--- a/docs/商业计划书.pptx
+++ b/docs/商业计划书.pptx
@@ -3115,8 +3115,8 @@
         </p:nvSpPr>
         <p:spPr>
           <a:xfrm>
-            <a:off x="0" y="2331720"/>
-            <a:ext cx="12191695" cy="54864"/>
+            <a:off x="0" y="2267712"/>
+            <a:ext cx="12191695" cy="45720"/>
           </a:xfrm>
           <a:prstGeom prst="rect">
             <a:avLst/>
@@ -3149,7 +3149,7 @@
           <a:p>
             <a:pPr algn="ctr">
               <a:lnSpc>
-                <a:spcPct val="100000"/>
+                <a:spcPct val="105000"/>
               </a:lnSpc>
             </a:pPr>
             <a:r>
@@ -3174,8 +3174,8 @@
         </p:nvSpPr>
         <p:spPr>
           <a:xfrm>
-            <a:off x="731520" y="1371600"/>
-            <a:ext cx="10698480" cy="914400"/>
+            <a:off x="685800" y="1280160"/>
+            <a:ext cx="10789920" cy="914400"/>
           </a:xfrm>
           <a:prstGeom prst="rect">
             <a:avLst/>
@@ -3194,7 +3194,7 @@
               </a:lnSpc>
             </a:pPr>
             <a:r>
-              <a:rPr sz="4600" b="1" i="0">
+              <a:rPr sz="4800" b="1" i="0">
                 <a:solidFill>
                   <a:srgbClr val="FFFFFF"/>
                 </a:solidFill>
@@ -3215,8 +3215,8 @@
         </p:nvSpPr>
         <p:spPr>
           <a:xfrm>
-            <a:off x="731520" y="2514600"/>
-            <a:ext cx="10698480" cy="822960"/>
+            <a:off x="685800" y="2450592"/>
+            <a:ext cx="10789920" cy="777240"/>
           </a:xfrm>
           <a:prstGeom prst="rect">
             <a:avLst/>
@@ -3256,8 +3256,8 @@
         </p:nvSpPr>
         <p:spPr>
           <a:xfrm>
-            <a:off x="731520" y="3429000"/>
-            <a:ext cx="10698480" cy="640080"/>
+            <a:off x="685800" y="3383280"/>
+            <a:ext cx="10789920" cy="594360"/>
           </a:xfrm>
           <a:prstGeom prst="rect">
             <a:avLst/>
@@ -3297,8 +3297,8 @@
         </p:nvSpPr>
         <p:spPr>
           <a:xfrm>
-            <a:off x="731520" y="5120640"/>
-            <a:ext cx="10698480" cy="548640"/>
+            <a:off x="685800" y="5029200"/>
+            <a:ext cx="10789920" cy="502920"/>
           </a:xfrm>
           <a:prstGeom prst="rect">
             <a:avLst/>
@@ -3317,6 +3317,47 @@
               </a:lnSpc>
             </a:pPr>
             <a:r>
+              <a:rPr sz="1400" b="0" i="0">
+                <a:solidFill>
+                  <a:srgbClr val="A0A8B4"/>
+                </a:solidFill>
+                <a:latin typeface="Microsoft YaHei"/>
+                <a:ea typeface="Microsoft YaHei"/>
+                <a:cs typeface="Microsoft YaHei"/>
+              </a:rPr>
+              <a:t>商业计划书 · 5 分钟路演</a:t>
+            </a:r>
+          </a:p>
+        </p:txBody>
+      </p:sp>
+      <p:sp>
+        <p:nvSpPr>
+          <p:cNvPr id="7" name="TextBox 6"/>
+          <p:cNvSpPr txBox="1"/>
+          <p:nvPr/>
+        </p:nvSpPr>
+        <p:spPr>
+          <a:xfrm>
+            <a:off x="685800" y="5532120"/>
+            <a:ext cx="10789920" cy="411480"/>
+          </a:xfrm>
+          <a:prstGeom prst="rect">
+            <a:avLst/>
+          </a:prstGeom>
+          <a:noFill/>
+        </p:spPr>
+        <p:txBody>
+          <a:bodyPr wrap="square" anchor="t" lIns="36576" rIns="36576" tIns="18288" bIns="18288">
+            <a:spAutoFit/>
+          </a:bodyPr>
+          <a:lstStyle/>
+          <a:p>
+            <a:pPr algn="l">
+              <a:lnSpc>
+                <a:spcPct val="115000"/>
+              </a:lnSpc>
+            </a:pPr>
+            <a:r>
               <a:rPr sz="1300" b="0" i="0">
                 <a:solidFill>
                   <a:srgbClr val="5B6372"/>
@@ -3325,7 +3366,7 @@
                 <a:ea typeface="Microsoft YaHei"/>
                 <a:cs typeface="Microsoft YaHei"/>
               </a:rPr>
-              <a:t>商业计划书 · 5 分钟路演  |  团队：XiAn-07 · 美泽 · （组员3）</a:t>
+              <a:t>团队：XiAn-07 · 美泽 · （组员3）</a:t>
             </a:r>
           </a:p>
         </p:txBody>
@@ -3344,7 +3385,7 @@
     <p:bg>
       <p:bgPr>
         <a:solidFill>
-          <a:srgbClr val="FFFFFF"/>
+          <a:srgbClr val="FAFBFC"/>
         </a:solidFill>
         <a:effectLst/>
       </p:bgPr>
@@ -3365,7 +3406,7 @@
         <p:spPr>
           <a:xfrm>
             <a:off x="0" y="0"/>
-            <a:ext cx="12191695" cy="960120"/>
+            <a:ext cx="12191695" cy="914400"/>
           </a:xfrm>
           <a:prstGeom prst="rect">
             <a:avLst/>
@@ -3398,7 +3439,7 @@
           <a:p>
             <a:pPr algn="ctr">
               <a:lnSpc>
-                <a:spcPct val="100000"/>
+                <a:spcPct val="105000"/>
               </a:lnSpc>
             </a:pPr>
             <a:r>
@@ -3424,7 +3465,7 @@
         <p:spPr>
           <a:xfrm>
             <a:off x="0" y="0"/>
-            <a:ext cx="128016" cy="960120"/>
+            <a:ext cx="109728" cy="914400"/>
           </a:xfrm>
           <a:prstGeom prst="rect">
             <a:avLst/>
@@ -3457,7 +3498,7 @@
           <a:p>
             <a:pPr algn="ctr">
               <a:lnSpc>
-                <a:spcPct val="100000"/>
+                <a:spcPct val="105000"/>
               </a:lnSpc>
             </a:pPr>
             <a:r>
@@ -3482,8 +3523,8 @@
         </p:nvSpPr>
         <p:spPr>
           <a:xfrm>
-            <a:off x="411480" y="109728"/>
-            <a:ext cx="10515600" cy="777240"/>
+            <a:off x="384048" y="73152"/>
+            <a:ext cx="10515600" cy="768096"/>
           </a:xfrm>
           <a:prstGeom prst="rect">
             <a:avLst/>
@@ -3523,8 +3564,8 @@
         </p:nvSpPr>
         <p:spPr>
           <a:xfrm>
-            <a:off x="411480" y="6419088"/>
-            <a:ext cx="8229600" cy="365760"/>
+            <a:off x="384048" y="6400800"/>
+            <a:ext cx="8229600" cy="347472"/>
           </a:xfrm>
           <a:prstGeom prst="rect">
             <a:avLst/>
@@ -3564,8 +3605,8 @@
         </p:nvSpPr>
         <p:spPr>
           <a:xfrm>
-            <a:off x="10332720" y="6419088"/>
-            <a:ext cx="1371600" cy="365760"/>
+            <a:off x="10241280" y="6400800"/>
+            <a:ext cx="1508760" cy="347472"/>
           </a:xfrm>
           <a:prstGeom prst="rect">
             <a:avLst/>
@@ -3605,8 +3646,8 @@
         </p:nvSpPr>
         <p:spPr>
           <a:xfrm>
-            <a:off x="457200" y="1325880"/>
-            <a:ext cx="5486400" cy="3657600"/>
+            <a:off x="457200" y="1005840"/>
+            <a:ext cx="5577840" cy="3657600"/>
           </a:xfrm>
           <a:prstGeom prst="rect">
             <a:avLst/>
@@ -3618,6 +3659,30 @@
             <a:spAutoFit/>
           </a:bodyPr>
           <a:lstStyle/>
+          <a:p>
+            <a:pPr algn="l">
+              <a:lnSpc>
+                <a:spcPct val="115000"/>
+              </a:lnSpc>
+              <a:spcBef>
+                <a:spcPts val="400"/>
+              </a:spcBef>
+              <a:spcAft>
+                <a:spcPts val="300"/>
+              </a:spcAft>
+            </a:pPr>
+            <a:r>
+              <a:rPr sz="1500" b="1" i="0">
+                <a:solidFill>
+                  <a:srgbClr val="16213A"/>
+                </a:solidFill>
+                <a:latin typeface="Microsoft YaHei"/>
+                <a:ea typeface="Microsoft YaHei"/>
+                <a:cs typeface="Microsoft YaHei"/>
+              </a:rPr>
+              <a:t>• B2C 免费增值模式</a:t>
+            </a:r>
+          </a:p>
           <a:p>
             <a:pPr algn="l">
               <a:lnSpc>
@@ -3631,15 +3696,15 @@
               </a:spcAft>
             </a:pPr>
             <a:r>
-              <a:rPr sz="1500" b="1" i="0">
-                <a:solidFill>
-                  <a:srgbClr val="16213A"/>
-                </a:solidFill>
-                <a:latin typeface="Microsoft YaHei"/>
-                <a:ea typeface="Microsoft YaHei"/>
-                <a:cs typeface="Microsoft YaHei"/>
-              </a:rPr>
-              <a:t>• B2C 免费增值</a:t>
+              <a:rPr sz="1300" b="0" i="0">
+                <a:solidFill>
+                  <a:srgbClr val="5B6372"/>
+                </a:solidFill>
+                <a:latin typeface="Microsoft YaHei"/>
+                <a:ea typeface="Microsoft YaHei"/>
+                <a:cs typeface="Microsoft YaHei"/>
+              </a:rPr>
+              <a:t>• 免费版：基础公平说明卡（一键生成，零门槛）</a:t>
             </a:r>
           </a:p>
           <a:p>
@@ -3663,7 +3728,31 @@
                 <a:ea typeface="Microsoft YaHei"/>
                 <a:cs typeface="Microsoft YaHei"/>
               </a:rPr>
-              <a:t>• 免费：基础公平说明卡</a:t>
+              <a:t>• 个人付费版：多产品横向对比 / PDF 报告下载 / 历史记录 / 适老语音播报</a:t>
+            </a:r>
+          </a:p>
+          <a:p>
+            <a:pPr algn="l">
+              <a:lnSpc>
+                <a:spcPct val="115000"/>
+              </a:lnSpc>
+              <a:spcBef>
+                <a:spcPts val="1000"/>
+              </a:spcBef>
+              <a:spcAft>
+                <a:spcPts val="300"/>
+              </a:spcAft>
+            </a:pPr>
+            <a:r>
+              <a:rPr sz="1500" b="1" i="0">
+                <a:solidFill>
+                  <a:srgbClr val="16213A"/>
+                </a:solidFill>
+                <a:latin typeface="Microsoft YaHei"/>
+                <a:ea typeface="Microsoft YaHei"/>
+                <a:cs typeface="Microsoft YaHei"/>
+              </a:rPr>
+              <a:t>• B2B 企业服务模式</a:t>
             </a:r>
           </a:p>
           <a:p>
@@ -3687,31 +3776,7 @@
                 <a:ea typeface="Microsoft YaHei"/>
                 <a:cs typeface="Microsoft YaHei"/>
               </a:rPr>
-              <a:t>• 付费：多产品对比 / PDF 报告 / 历史记录 / 适老语音</a:t>
-            </a:r>
-          </a:p>
-          <a:p>
-            <a:pPr algn="l">
-              <a:lnSpc>
-                <a:spcPct val="115000"/>
-              </a:lnSpc>
-              <a:spcBef>
-                <a:spcPts val="1000"/>
-              </a:spcBef>
-              <a:spcAft>
-                <a:spcPts val="300"/>
-              </a:spcAft>
-            </a:pPr>
-            <a:r>
-              <a:rPr sz="1500" b="1" i="0">
-                <a:solidFill>
-                  <a:srgbClr val="16213A"/>
-                </a:solidFill>
-                <a:latin typeface="Microsoft YaHei"/>
-                <a:ea typeface="Microsoft YaHei"/>
-                <a:cs typeface="Microsoft YaHei"/>
-              </a:rPr>
-              <a:t>• B2B 初审与部署</a:t>
+              <a:t>• 营销材料初审（消保合规审查）</a:t>
             </a:r>
           </a:p>
           <a:p>
@@ -3735,7 +3800,31 @@
                 <a:ea typeface="Microsoft YaHei"/>
                 <a:cs typeface="Microsoft YaHei"/>
               </a:rPr>
-              <a:t>• 营销材料初审 / 产品说明通俗化 / 私有化 / API 接入</a:t>
+              <a:t>• 产品说明通俗化（面向零售客户）</a:t>
+            </a:r>
+          </a:p>
+          <a:p>
+            <a:pPr algn="l">
+              <a:lnSpc>
+                <a:spcPct val="115000"/>
+              </a:lnSpc>
+              <a:spcBef>
+                <a:spcPts val="300"/>
+              </a:spcBef>
+              <a:spcAft>
+                <a:spcPts val="300"/>
+              </a:spcAft>
+            </a:pPr>
+            <a:r>
+              <a:rPr sz="1300" b="0" i="0">
+                <a:solidFill>
+                  <a:srgbClr val="5B6372"/>
+                </a:solidFill>
+                <a:latin typeface="Microsoft YaHei"/>
+                <a:ea typeface="Microsoft YaHei"/>
+                <a:cs typeface="Microsoft YaHei"/>
+              </a:rPr>
+              <a:t>• 私有化部署 / API 接入（银行 / 券商 / 第三方平台）</a:t>
             </a:r>
           </a:p>
         </p:txBody>
@@ -3748,8 +3837,8 @@
         </p:nvSpPr>
         <p:spPr>
           <a:xfrm>
-            <a:off x="6400800" y="1371600"/>
-            <a:ext cx="2468880" cy="365760"/>
+            <a:off x="6537960" y="1005840"/>
+            <a:ext cx="2487168" cy="347472"/>
           </a:xfrm>
           <a:prstGeom prst="rect">
             <a:avLst/>
@@ -3789,8 +3878,8 @@
         </p:nvSpPr>
         <p:spPr>
           <a:xfrm>
-            <a:off x="6400800" y="3794760"/>
-            <a:ext cx="2468880" cy="731520"/>
+            <a:off x="6537960" y="3867911"/>
+            <a:ext cx="2487168" cy="713232"/>
           </a:xfrm>
           <a:prstGeom prst="roundRect">
             <a:avLst/>
@@ -3823,7 +3912,7 @@
           <a:p>
             <a:pPr algn="ctr">
               <a:lnSpc>
-                <a:spcPct val="100000"/>
+                <a:spcPct val="105000"/>
               </a:lnSpc>
             </a:pPr>
             <a:r>
@@ -3835,7 +3924,7 @@
                 <a:ea typeface="Microsoft YaHei"/>
                 <a:cs typeface="Microsoft YaHei"/>
               </a:rPr>
-              <a:t>订阅</a:t>
+              <a:t>订阅会员</a:t>
             </a:r>
           </a:p>
         </p:txBody>
@@ -3848,8 +3937,8 @@
         </p:nvSpPr>
         <p:spPr>
           <a:xfrm>
-            <a:off x="7452360" y="3794760"/>
-            <a:ext cx="365760" cy="182880"/>
+            <a:off x="7534656" y="3867911"/>
+            <a:ext cx="384048" cy="182880"/>
           </a:xfrm>
           <a:prstGeom prst="upArrow">
             <a:avLst/>
@@ -3892,8 +3981,8 @@
         </p:nvSpPr>
         <p:spPr>
           <a:xfrm>
-            <a:off x="6400800" y="2926079"/>
-            <a:ext cx="2468880" cy="731520"/>
+            <a:off x="6537960" y="3008375"/>
+            <a:ext cx="2487168" cy="713232"/>
           </a:xfrm>
           <a:prstGeom prst="roundRect">
             <a:avLst/>
@@ -3926,7 +4015,7 @@
           <a:p>
             <a:pPr algn="ctr">
               <a:lnSpc>
-                <a:spcPct val="100000"/>
+                <a:spcPct val="105000"/>
               </a:lnSpc>
             </a:pPr>
             <a:r>
@@ -3951,8 +4040,8 @@
         </p:nvSpPr>
         <p:spPr>
           <a:xfrm>
-            <a:off x="7452360" y="2926079"/>
-            <a:ext cx="365760" cy="182880"/>
+            <a:off x="7534656" y="3008375"/>
+            <a:ext cx="384048" cy="182880"/>
           </a:xfrm>
           <a:prstGeom prst="upArrow">
             <a:avLst/>
@@ -3995,8 +4084,8 @@
         </p:nvSpPr>
         <p:spPr>
           <a:xfrm>
-            <a:off x="6400800" y="2057399"/>
-            <a:ext cx="2468880" cy="731520"/>
+            <a:off x="6537960" y="2148839"/>
+            <a:ext cx="2487168" cy="713232"/>
           </a:xfrm>
           <a:prstGeom prst="roundRect">
             <a:avLst/>
@@ -4029,7 +4118,7 @@
           <a:p>
             <a:pPr algn="ctr">
               <a:lnSpc>
-                <a:spcPct val="100000"/>
+                <a:spcPct val="105000"/>
               </a:lnSpc>
             </a:pPr>
             <a:r>
@@ -4054,8 +4143,8 @@
         </p:nvSpPr>
         <p:spPr>
           <a:xfrm>
-            <a:off x="7452360" y="2057399"/>
-            <a:ext cx="365760" cy="182880"/>
+            <a:off x="7534656" y="2148839"/>
+            <a:ext cx="384048" cy="182880"/>
           </a:xfrm>
           <a:prstGeom prst="upArrow">
             <a:avLst/>
@@ -4098,8 +4187,8 @@
         </p:nvSpPr>
         <p:spPr>
           <a:xfrm>
-            <a:off x="9235440" y="1371600"/>
-            <a:ext cx="2468880" cy="365760"/>
+            <a:off x="9646920" y="1005840"/>
+            <a:ext cx="2487168" cy="347472"/>
           </a:xfrm>
           <a:prstGeom prst="rect">
             <a:avLst/>
@@ -4139,8 +4228,8 @@
         </p:nvSpPr>
         <p:spPr>
           <a:xfrm>
-            <a:off x="9235440" y="3794760"/>
-            <a:ext cx="2468880" cy="731520"/>
+            <a:off x="9646920" y="3867911"/>
+            <a:ext cx="2487168" cy="713232"/>
           </a:xfrm>
           <a:prstGeom prst="roundRect">
             <a:avLst/>
@@ -4173,7 +4262,7 @@
           <a:p>
             <a:pPr algn="ctr">
               <a:lnSpc>
-                <a:spcPct val="100000"/>
+                <a:spcPct val="105000"/>
               </a:lnSpc>
             </a:pPr>
             <a:r>
@@ -4198,8 +4287,8 @@
         </p:nvSpPr>
         <p:spPr>
           <a:xfrm>
-            <a:off x="10287000" y="3794760"/>
-            <a:ext cx="365760" cy="182880"/>
+            <a:off x="10643616" y="3867911"/>
+            <a:ext cx="384048" cy="182880"/>
           </a:xfrm>
           <a:prstGeom prst="upArrow">
             <a:avLst/>
@@ -4242,8 +4331,8 @@
         </p:nvSpPr>
         <p:spPr>
           <a:xfrm>
-            <a:off x="9235440" y="2926079"/>
-            <a:ext cx="2468880" cy="731520"/>
+            <a:off x="9646920" y="3008375"/>
+            <a:ext cx="2487168" cy="713232"/>
           </a:xfrm>
           <a:prstGeom prst="roundRect">
             <a:avLst/>
@@ -4276,7 +4365,7 @@
           <a:p>
             <a:pPr algn="ctr">
               <a:lnSpc>
-                <a:spcPct val="100000"/>
+                <a:spcPct val="105000"/>
               </a:lnSpc>
             </a:pPr>
             <a:r>
@@ -4301,8 +4390,8 @@
         </p:nvSpPr>
         <p:spPr>
           <a:xfrm>
-            <a:off x="10287000" y="2926079"/>
-            <a:ext cx="365760" cy="182880"/>
+            <a:off x="10643616" y="3008375"/>
+            <a:ext cx="384048" cy="182880"/>
           </a:xfrm>
           <a:prstGeom prst="upArrow">
             <a:avLst/>
@@ -4345,8 +4434,8 @@
         </p:nvSpPr>
         <p:spPr>
           <a:xfrm>
-            <a:off x="9235440" y="2057399"/>
-            <a:ext cx="2468880" cy="731520"/>
+            <a:off x="9646920" y="2148839"/>
+            <a:ext cx="2487168" cy="713232"/>
           </a:xfrm>
           <a:prstGeom prst="roundRect">
             <a:avLst/>
@@ -4379,7 +4468,7 @@
           <a:p>
             <a:pPr algn="ctr">
               <a:lnSpc>
-                <a:spcPct val="100000"/>
+                <a:spcPct val="105000"/>
               </a:lnSpc>
             </a:pPr>
             <a:r>
@@ -4404,8 +4493,8 @@
         </p:nvSpPr>
         <p:spPr>
           <a:xfrm>
-            <a:off x="10287000" y="2057399"/>
-            <a:ext cx="365760" cy="182880"/>
+            <a:off x="10643616" y="2148839"/>
+            <a:ext cx="384048" cy="182880"/>
           </a:xfrm>
           <a:prstGeom prst="upArrow">
             <a:avLst/>
@@ -4454,7 +4543,7 @@
     <p:bg>
       <p:bgPr>
         <a:solidFill>
-          <a:srgbClr val="FFFFFF"/>
+          <a:srgbClr val="FAFBFC"/>
         </a:solidFill>
         <a:effectLst/>
       </p:bgPr>
@@ -4475,7 +4564,7 @@
         <p:spPr>
           <a:xfrm>
             <a:off x="0" y="0"/>
-            <a:ext cx="12191695" cy="960120"/>
+            <a:ext cx="12191695" cy="914400"/>
           </a:xfrm>
           <a:prstGeom prst="rect">
             <a:avLst/>
@@ -4508,7 +4597,7 @@
           <a:p>
             <a:pPr algn="ctr">
               <a:lnSpc>
-                <a:spcPct val="100000"/>
+                <a:spcPct val="105000"/>
               </a:lnSpc>
             </a:pPr>
             <a:r>
@@ -4534,7 +4623,7 @@
         <p:spPr>
           <a:xfrm>
             <a:off x="0" y="0"/>
-            <a:ext cx="128016" cy="960120"/>
+            <a:ext cx="109728" cy="914400"/>
           </a:xfrm>
           <a:prstGeom prst="rect">
             <a:avLst/>
@@ -4567,7 +4656,7 @@
           <a:p>
             <a:pPr algn="ctr">
               <a:lnSpc>
-                <a:spcPct val="100000"/>
+                <a:spcPct val="105000"/>
               </a:lnSpc>
             </a:pPr>
             <a:r>
@@ -4592,8 +4681,8 @@
         </p:nvSpPr>
         <p:spPr>
           <a:xfrm>
-            <a:off x="411480" y="109728"/>
-            <a:ext cx="10515600" cy="777240"/>
+            <a:off x="384048" y="73152"/>
+            <a:ext cx="10515600" cy="768096"/>
           </a:xfrm>
           <a:prstGeom prst="rect">
             <a:avLst/>
@@ -4633,8 +4722,8 @@
         </p:nvSpPr>
         <p:spPr>
           <a:xfrm>
-            <a:off x="411480" y="6419088"/>
-            <a:ext cx="8229600" cy="365760"/>
+            <a:off x="384048" y="6400800"/>
+            <a:ext cx="8229600" cy="347472"/>
           </a:xfrm>
           <a:prstGeom prst="rect">
             <a:avLst/>
@@ -4674,8 +4763,8 @@
         </p:nvSpPr>
         <p:spPr>
           <a:xfrm>
-            <a:off x="10332720" y="6419088"/>
-            <a:ext cx="1371600" cy="365760"/>
+            <a:off x="10241280" y="6400800"/>
+            <a:ext cx="1508760" cy="347472"/>
           </a:xfrm>
           <a:prstGeom prst="rect">
             <a:avLst/>
@@ -4715,8 +4804,8 @@
         </p:nvSpPr>
         <p:spPr>
           <a:xfrm>
-            <a:off x="457200" y="1325880"/>
-            <a:ext cx="5486400" cy="3657600"/>
+            <a:off x="457200" y="1005840"/>
+            <a:ext cx="5577840" cy="3657600"/>
           </a:xfrm>
           <a:prstGeom prst="rect">
             <a:avLst/>
@@ -4737,19 +4826,19 @@
                 <a:spcPts val="400"/>
               </a:spcBef>
               <a:spcAft>
-                <a:spcPts val="400"/>
+                <a:spcPts val="300"/>
               </a:spcAft>
             </a:pPr>
             <a:r>
               <a:rPr sz="1500" b="1" i="0">
                 <a:solidFill>
-                  <a:srgbClr val="222833"/>
-                </a:solidFill>
-                <a:latin typeface="Microsoft YaHei"/>
-                <a:ea typeface="Microsoft YaHei"/>
-                <a:cs typeface="Microsoft YaHei"/>
-              </a:rPr>
-              <a:t>• 首批来源：校园金融教育 / 投资者教育 / 消保活动</a:t>
+                  <a:srgbClr val="16213A"/>
+                </a:solidFill>
+                <a:latin typeface="Microsoft YaHei"/>
+                <a:ea typeface="Microsoft YaHei"/>
+                <a:cs typeface="Microsoft YaHei"/>
+              </a:rPr>
+              <a:t>• 首批用户来源</a:t>
             </a:r>
           </a:p>
           <a:p>
@@ -4758,10 +4847,10 @@
                 <a:spcPct val="115000"/>
               </a:lnSpc>
               <a:spcBef>
-                <a:spcPts val="400"/>
+                <a:spcPts val="300"/>
               </a:spcBef>
               <a:spcAft>
-                <a:spcPts val="400"/>
+                <a:spcPts val="300"/>
               </a:spcAft>
             </a:pPr>
             <a:r>
@@ -4773,7 +4862,7 @@
                 <a:ea typeface="Microsoft YaHei"/>
                 <a:cs typeface="Microsoft YaHei"/>
               </a:rPr>
-              <a:t>• 线上：小红书 / B站 科普内容</a:t>
+              <a:t>• 校园金融教育活动 / 投资者教育 / 消保活动</a:t>
             </a:r>
           </a:p>
           <a:p>
@@ -4782,22 +4871,22 @@
                 <a:spcPct val="115000"/>
               </a:lnSpc>
               <a:spcBef>
-                <a:spcPts val="400"/>
+                <a:spcPts val="1000"/>
               </a:spcBef>
               <a:spcAft>
-                <a:spcPts val="400"/>
+                <a:spcPts val="300"/>
               </a:spcAft>
             </a:pPr>
             <a:r>
-              <a:rPr sz="1300" b="0" i="0">
-                <a:solidFill>
-                  <a:srgbClr val="5B6372"/>
-                </a:solidFill>
-                <a:latin typeface="Microsoft YaHei"/>
-                <a:ea typeface="Microsoft YaHei"/>
-                <a:cs typeface="Microsoft YaHei"/>
-              </a:rPr>
-              <a:t>• 保险理财社群、高校金融社团</a:t>
+              <a:rPr sz="1500" b="1" i="0">
+                <a:solidFill>
+                  <a:srgbClr val="16213A"/>
+                </a:solidFill>
+                <a:latin typeface="Microsoft YaHei"/>
+                <a:ea typeface="Microsoft YaHei"/>
+                <a:cs typeface="Microsoft YaHei"/>
+              </a:rPr>
+              <a:t>• 线上获客渠道</a:t>
             </a:r>
           </a:p>
           <a:p>
@@ -4806,10 +4895,10 @@
                 <a:spcPct val="115000"/>
               </a:lnSpc>
               <a:spcBef>
-                <a:spcPts val="800"/>
+                <a:spcPts val="300"/>
               </a:spcBef>
               <a:spcAft>
-                <a:spcPts val="400"/>
+                <a:spcPts val="300"/>
               </a:spcAft>
             </a:pPr>
             <a:r>
@@ -4821,7 +4910,79 @@
                 <a:ea typeface="Microsoft YaHei"/>
                 <a:cs typeface="Microsoft YaHei"/>
               </a:rPr>
-              <a:t>• 路径：科普 → 免费卡 → 注册 → 高级报告 → 订阅</a:t>
+              <a:t>• 小红书 / B站 金融科普内容（短视频 / 图文）</a:t>
+            </a:r>
+          </a:p>
+          <a:p>
+            <a:pPr algn="l">
+              <a:lnSpc>
+                <a:spcPct val="115000"/>
+              </a:lnSpc>
+              <a:spcBef>
+                <a:spcPts val="300"/>
+              </a:spcBef>
+              <a:spcAft>
+                <a:spcPts val="300"/>
+              </a:spcAft>
+            </a:pPr>
+            <a:r>
+              <a:rPr sz="1300" b="0" i="0">
+                <a:solidFill>
+                  <a:srgbClr val="5B6372"/>
+                </a:solidFill>
+                <a:latin typeface="Microsoft YaHei"/>
+                <a:ea typeface="Microsoft YaHei"/>
+                <a:cs typeface="Microsoft YaHei"/>
+              </a:rPr>
+              <a:t>• 保险理财社群、高校金融社团、知乎理财话题</a:t>
+            </a:r>
+          </a:p>
+          <a:p>
+            <a:pPr algn="l">
+              <a:lnSpc>
+                <a:spcPct val="115000"/>
+              </a:lnSpc>
+              <a:spcBef>
+                <a:spcPts val="1000"/>
+              </a:spcBef>
+              <a:spcAft>
+                <a:spcPts val="300"/>
+              </a:spcAft>
+            </a:pPr>
+            <a:r>
+              <a:rPr sz="1500" b="1" i="0">
+                <a:solidFill>
+                  <a:srgbClr val="16213A"/>
+                </a:solidFill>
+                <a:latin typeface="Microsoft YaHei"/>
+                <a:ea typeface="Microsoft YaHei"/>
+                <a:cs typeface="Microsoft YaHei"/>
+              </a:rPr>
+              <a:t>• 转化路径</a:t>
+            </a:r>
+          </a:p>
+          <a:p>
+            <a:pPr algn="l">
+              <a:lnSpc>
+                <a:spcPct val="115000"/>
+              </a:lnSpc>
+              <a:spcBef>
+                <a:spcPts val="300"/>
+              </a:spcBef>
+              <a:spcAft>
+                <a:spcPts val="300"/>
+              </a:spcAft>
+            </a:pPr>
+            <a:r>
+              <a:rPr sz="1300" b="0" i="0">
+                <a:solidFill>
+                  <a:srgbClr val="5B6372"/>
+                </a:solidFill>
+                <a:latin typeface="Microsoft YaHei"/>
+                <a:ea typeface="Microsoft YaHei"/>
+                <a:cs typeface="Microsoft YaHei"/>
+              </a:rPr>
+              <a:t>• 科普内容引流 → 免费公平说明卡体验 → 注册保存历史 → 高级功能订阅 / B2B 采购</a:t>
             </a:r>
           </a:p>
         </p:txBody>
@@ -4834,8 +4995,8 @@
         </p:nvSpPr>
         <p:spPr>
           <a:xfrm>
-            <a:off x="6583680" y="1463040"/>
-            <a:ext cx="4937760" cy="749808"/>
+            <a:off x="6515100" y="1143000"/>
+            <a:ext cx="4892040" cy="713232"/>
           </a:xfrm>
           <a:prstGeom prst="trapezoid">
             <a:avLst/>
@@ -4868,7 +5029,7 @@
           <a:p>
             <a:pPr algn="ctr">
               <a:lnSpc>
-                <a:spcPct val="100000"/>
+                <a:spcPct val="105000"/>
               </a:lnSpc>
             </a:pPr>
             <a:r>
@@ -4893,8 +5054,8 @@
         </p:nvSpPr>
         <p:spPr>
           <a:xfrm>
-            <a:off x="6949440" y="2304288"/>
-            <a:ext cx="4206240" cy="749808"/>
+            <a:off x="6880860" y="1929384"/>
+            <a:ext cx="4160520" cy="713232"/>
           </a:xfrm>
           <a:prstGeom prst="trapezoid">
             <a:avLst/>
@@ -4927,7 +5088,7 @@
           <a:p>
             <a:pPr algn="ctr">
               <a:lnSpc>
-                <a:spcPct val="100000"/>
+                <a:spcPct val="105000"/>
               </a:lnSpc>
             </a:pPr>
             <a:r>
@@ -4952,8 +5113,8 @@
         </p:nvSpPr>
         <p:spPr>
           <a:xfrm>
-            <a:off x="7315200" y="3145536"/>
-            <a:ext cx="3474720" cy="749808"/>
+            <a:off x="7246620" y="2715768"/>
+            <a:ext cx="3429000" cy="713232"/>
           </a:xfrm>
           <a:prstGeom prst="trapezoid">
             <a:avLst/>
@@ -4986,7 +5147,7 @@
           <a:p>
             <a:pPr algn="ctr">
               <a:lnSpc>
-                <a:spcPct val="100000"/>
+                <a:spcPct val="105000"/>
               </a:lnSpc>
             </a:pPr>
             <a:r>
@@ -5011,8 +5172,8 @@
         </p:nvSpPr>
         <p:spPr>
           <a:xfrm>
-            <a:off x="7680960" y="3986784"/>
-            <a:ext cx="2743200" cy="749808"/>
+            <a:off x="7612380" y="3502151"/>
+            <a:ext cx="2697480" cy="713232"/>
           </a:xfrm>
           <a:prstGeom prst="trapezoid">
             <a:avLst/>
@@ -5045,7 +5206,7 @@
           <a:p>
             <a:pPr algn="ctr">
               <a:lnSpc>
-                <a:spcPct val="100000"/>
+                <a:spcPct val="105000"/>
               </a:lnSpc>
             </a:pPr>
             <a:r>
@@ -5070,8 +5231,8 @@
         </p:nvSpPr>
         <p:spPr>
           <a:xfrm>
-            <a:off x="8046720" y="4828032"/>
-            <a:ext cx="2011680" cy="749808"/>
+            <a:off x="7978140" y="4288536"/>
+            <a:ext cx="1965960" cy="713232"/>
           </a:xfrm>
           <a:prstGeom prst="trapezoid">
             <a:avLst/>
@@ -5104,7 +5265,7 @@
           <a:p>
             <a:pPr algn="ctr">
               <a:lnSpc>
-                <a:spcPct val="100000"/>
+                <a:spcPct val="105000"/>
               </a:lnSpc>
             </a:pPr>
             <a:r>
@@ -5135,7 +5296,7 @@
     <p:bg>
       <p:bgPr>
         <a:solidFill>
-          <a:srgbClr val="FFFFFF"/>
+          <a:srgbClr val="FAFBFC"/>
         </a:solidFill>
         <a:effectLst/>
       </p:bgPr>
@@ -5156,7 +5317,7 @@
         <p:spPr>
           <a:xfrm>
             <a:off x="0" y="0"/>
-            <a:ext cx="12191695" cy="960120"/>
+            <a:ext cx="12191695" cy="914400"/>
           </a:xfrm>
           <a:prstGeom prst="rect">
             <a:avLst/>
@@ -5189,7 +5350,7 @@
           <a:p>
             <a:pPr algn="ctr">
               <a:lnSpc>
-                <a:spcPct val="100000"/>
+                <a:spcPct val="105000"/>
               </a:lnSpc>
             </a:pPr>
             <a:r>
@@ -5215,7 +5376,7 @@
         <p:spPr>
           <a:xfrm>
             <a:off x="0" y="0"/>
-            <a:ext cx="128016" cy="960120"/>
+            <a:ext cx="109728" cy="914400"/>
           </a:xfrm>
           <a:prstGeom prst="rect">
             <a:avLst/>
@@ -5248,7 +5409,7 @@
           <a:p>
             <a:pPr algn="ctr">
               <a:lnSpc>
-                <a:spcPct val="100000"/>
+                <a:spcPct val="105000"/>
               </a:lnSpc>
             </a:pPr>
             <a:r>
@@ -5273,8 +5434,8 @@
         </p:nvSpPr>
         <p:spPr>
           <a:xfrm>
-            <a:off x="411480" y="109728"/>
-            <a:ext cx="10515600" cy="777240"/>
+            <a:off x="384048" y="73152"/>
+            <a:ext cx="10515600" cy="768096"/>
           </a:xfrm>
           <a:prstGeom prst="rect">
             <a:avLst/>
@@ -5314,8 +5475,8 @@
         </p:nvSpPr>
         <p:spPr>
           <a:xfrm>
-            <a:off x="411480" y="6419088"/>
-            <a:ext cx="8229600" cy="365760"/>
+            <a:off x="384048" y="6400800"/>
+            <a:ext cx="8229600" cy="347472"/>
           </a:xfrm>
           <a:prstGeom prst="rect">
             <a:avLst/>
@@ -5355,8 +5516,8 @@
         </p:nvSpPr>
         <p:spPr>
           <a:xfrm>
-            <a:off x="10332720" y="6419088"/>
-            <a:ext cx="1371600" cy="365760"/>
+            <a:off x="10241280" y="6400800"/>
+            <a:ext cx="1508760" cy="347472"/>
           </a:xfrm>
           <a:prstGeom prst="rect">
             <a:avLst/>
@@ -5396,8 +5557,8 @@
         </p:nvSpPr>
         <p:spPr>
           <a:xfrm>
-            <a:off x="457200" y="1280160"/>
-            <a:ext cx="5486400" cy="2743200"/>
+            <a:off x="457200" y="1005840"/>
+            <a:ext cx="5577840" cy="2560320"/>
           </a:xfrm>
           <a:prstGeom prst="rect">
             <a:avLst/>
@@ -5415,10 +5576,10 @@
                 <a:spcPct val="115000"/>
               </a:lnSpc>
               <a:spcBef>
-                <a:spcPts val="400"/>
+                <a:spcPts val="300"/>
               </a:spcBef>
               <a:spcAft>
-                <a:spcPts val="400"/>
+                <a:spcPts val="300"/>
               </a:spcAft>
             </a:pPr>
             <a:r>
@@ -5430,7 +5591,7 @@
                 <a:ea typeface="Microsoft YaHei"/>
                 <a:cs typeface="Microsoft YaHei"/>
               </a:rPr>
-              <a:t>• 扩展路径：银行理财 → 保险 / 基金 / 消费贷</a:t>
+              <a:t>• 扩展路径：从银行理财 → 保险 / 基金 / 消费贷</a:t>
             </a:r>
           </a:p>
           <a:p>
@@ -5439,10 +5600,10 @@
                 <a:spcPct val="115000"/>
               </a:lnSpc>
               <a:spcBef>
-                <a:spcPts val="400"/>
+                <a:spcPts val="300"/>
               </a:spcBef>
               <a:spcAft>
-                <a:spcPts val="400"/>
+                <a:spcPts val="300"/>
               </a:spcAft>
             </a:pPr>
             <a:r>
@@ -5454,7 +5615,103 @@
                 <a:ea typeface="Microsoft YaHei"/>
                 <a:cs typeface="Microsoft YaHei"/>
               </a:rPr>
-              <a:t>• 下一步：补外部用户验证、加海报 OCR、多产品对比</a:t>
+              <a:t>• 覆盖更多金融消费者，让「购买前信息公平」成为行业标配</a:t>
+            </a:r>
+          </a:p>
+          <a:p>
+            <a:pPr algn="l">
+              <a:lnSpc>
+                <a:spcPct val="115000"/>
+              </a:lnSpc>
+              <a:spcBef>
+                <a:spcPts val="1000"/>
+              </a:spcBef>
+              <a:spcAft>
+                <a:spcPts val="300"/>
+              </a:spcAft>
+            </a:pPr>
+            <a:r>
+              <a:rPr sz="1500" b="1" i="0">
+                <a:solidFill>
+                  <a:srgbClr val="16213A"/>
+                </a:solidFill>
+                <a:latin typeface="Microsoft YaHei"/>
+                <a:ea typeface="Microsoft YaHei"/>
+                <a:cs typeface="Microsoft YaHei"/>
+              </a:rPr>
+              <a:t>• 下一步重点工作</a:t>
+            </a:r>
+          </a:p>
+          <a:p>
+            <a:pPr algn="l">
+              <a:lnSpc>
+                <a:spcPct val="115000"/>
+              </a:lnSpc>
+              <a:spcBef>
+                <a:spcPts val="300"/>
+              </a:spcBef>
+              <a:spcAft>
+                <a:spcPts val="300"/>
+              </a:spcAft>
+            </a:pPr>
+            <a:r>
+              <a:rPr sz="1300" b="0" i="0">
+                <a:solidFill>
+                  <a:srgbClr val="5B6372"/>
+                </a:solidFill>
+                <a:latin typeface="Microsoft YaHei"/>
+                <a:ea typeface="Microsoft YaHei"/>
+                <a:cs typeface="Microsoft YaHei"/>
+              </a:rPr>
+              <a:t>• 补外部用户真实验证（招募志愿者试用并收集反馈）</a:t>
+            </a:r>
+          </a:p>
+          <a:p>
+            <a:pPr algn="l">
+              <a:lnSpc>
+                <a:spcPct val="115000"/>
+              </a:lnSpc>
+              <a:spcBef>
+                <a:spcPts val="300"/>
+              </a:spcBef>
+              <a:spcAft>
+                <a:spcPts val="300"/>
+              </a:spcAft>
+            </a:pPr>
+            <a:r>
+              <a:rPr sz="1300" b="0" i="0">
+                <a:solidFill>
+                  <a:srgbClr val="5B6372"/>
+                </a:solidFill>
+                <a:latin typeface="Microsoft YaHei"/>
+                <a:ea typeface="Microsoft YaHei"/>
+                <a:cs typeface="Microsoft YaHei"/>
+              </a:rPr>
+              <a:t>• 接入海报图片 OCR（识别宣传图片中的关键文字）</a:t>
+            </a:r>
+          </a:p>
+          <a:p>
+            <a:pPr algn="l">
+              <a:lnSpc>
+                <a:spcPct val="115000"/>
+              </a:lnSpc>
+              <a:spcBef>
+                <a:spcPts val="300"/>
+              </a:spcBef>
+              <a:spcAft>
+                <a:spcPts val="300"/>
+              </a:spcAft>
+            </a:pPr>
+            <a:r>
+              <a:rPr sz="1300" b="0" i="0">
+                <a:solidFill>
+                  <a:srgbClr val="5B6372"/>
+                </a:solidFill>
+                <a:latin typeface="Microsoft YaHei"/>
+                <a:ea typeface="Microsoft YaHei"/>
+                <a:cs typeface="Microsoft YaHei"/>
+              </a:rPr>
+              <a:t>• 支持多产品横向对比（同时上传 2–3 份说明书生成对比表）</a:t>
             </a:r>
           </a:p>
         </p:txBody>
@@ -5467,8 +5724,8 @@
         </p:nvSpPr>
         <p:spPr>
           <a:xfrm>
-            <a:off x="6400800" y="2331720"/>
-            <a:ext cx="5303520" cy="54864"/>
+            <a:off x="6400800" y="2395728"/>
+            <a:ext cx="5333695" cy="45720"/>
           </a:xfrm>
           <a:prstGeom prst="rect">
             <a:avLst/>
@@ -5501,7 +5758,7 @@
           <a:p>
             <a:pPr algn="ctr">
               <a:lnSpc>
-                <a:spcPct val="100000"/>
+                <a:spcPct val="105000"/>
               </a:lnSpc>
             </a:pPr>
             <a:r>
@@ -5526,8 +5783,8 @@
         </p:nvSpPr>
         <p:spPr>
           <a:xfrm>
-            <a:off x="6537959" y="2011680"/>
-            <a:ext cx="822960" cy="822960"/>
+            <a:off x="6784848" y="2075688"/>
+            <a:ext cx="786384" cy="786384"/>
           </a:xfrm>
           <a:prstGeom prst="ellipse">
             <a:avLst/>
@@ -5560,7 +5817,7 @@
           <a:p>
             <a:pPr algn="ctr">
               <a:lnSpc>
-                <a:spcPct val="100000"/>
+                <a:spcPct val="105000"/>
               </a:lnSpc>
             </a:pPr>
             <a:r>
@@ -5585,8 +5842,8 @@
         </p:nvSpPr>
         <p:spPr>
           <a:xfrm>
-            <a:off x="6035040" y="2880360"/>
-            <a:ext cx="1828800" cy="365760"/>
+            <a:off x="6281927" y="2953512"/>
+            <a:ext cx="1792224" cy="347472"/>
           </a:xfrm>
           <a:prstGeom prst="rect">
             <a:avLst/>
@@ -5613,7 +5870,7 @@
                 <a:ea typeface="Microsoft YaHei"/>
                 <a:cs typeface="Microsoft YaHei"/>
               </a:rPr>
-              <a:t>理财</a:t>
+              <a:t>银行理财</a:t>
             </a:r>
           </a:p>
         </p:txBody>
@@ -5626,8 +5883,8 @@
         </p:nvSpPr>
         <p:spPr>
           <a:xfrm>
-            <a:off x="8641080" y="2011680"/>
-            <a:ext cx="822960" cy="822960"/>
+            <a:off x="9253728" y="2075688"/>
+            <a:ext cx="786384" cy="786384"/>
           </a:xfrm>
           <a:prstGeom prst="ellipse">
             <a:avLst/>
@@ -5660,7 +5917,7 @@
           <a:p>
             <a:pPr algn="ctr">
               <a:lnSpc>
-                <a:spcPct val="100000"/>
+                <a:spcPct val="105000"/>
               </a:lnSpc>
             </a:pPr>
             <a:r>
@@ -5685,8 +5942,8 @@
         </p:nvSpPr>
         <p:spPr>
           <a:xfrm>
-            <a:off x="8138160" y="2880360"/>
-            <a:ext cx="1828800" cy="365760"/>
+            <a:off x="8750808" y="2953512"/>
+            <a:ext cx="1792224" cy="347472"/>
           </a:xfrm>
           <a:prstGeom prst="rect">
             <a:avLst/>
@@ -5713,7 +5970,7 @@
                 <a:ea typeface="Microsoft YaHei"/>
                 <a:cs typeface="Microsoft YaHei"/>
               </a:rPr>
-              <a:t>保险 · 基金</a:t>
+              <a:t>保险·基金</a:t>
             </a:r>
           </a:p>
         </p:txBody>
@@ -5726,8 +5983,8 @@
         </p:nvSpPr>
         <p:spPr>
           <a:xfrm>
-            <a:off x="10744200" y="2011680"/>
-            <a:ext cx="822960" cy="822960"/>
+            <a:off x="11722608" y="2075688"/>
+            <a:ext cx="786384" cy="786384"/>
           </a:xfrm>
           <a:prstGeom prst="ellipse">
             <a:avLst/>
@@ -5760,7 +6017,7 @@
           <a:p>
             <a:pPr algn="ctr">
               <a:lnSpc>
-                <a:spcPct val="100000"/>
+                <a:spcPct val="105000"/>
               </a:lnSpc>
             </a:pPr>
             <a:r>
@@ -5785,8 +6042,8 @@
         </p:nvSpPr>
         <p:spPr>
           <a:xfrm>
-            <a:off x="10241280" y="2880360"/>
-            <a:ext cx="1828800" cy="365760"/>
+            <a:off x="11219688" y="2953512"/>
+            <a:ext cx="1792224" cy="347472"/>
           </a:xfrm>
           <a:prstGeom prst="rect">
             <a:avLst/>
@@ -5813,7 +6070,7 @@
                 <a:ea typeface="Microsoft YaHei"/>
                 <a:cs typeface="Microsoft YaHei"/>
               </a:rPr>
-              <a:t>消费贷 · API</a:t>
+              <a:t>消费贷·API</a:t>
             </a:r>
           </a:p>
         </p:txBody>
@@ -5826,8 +6083,8 @@
         </p:nvSpPr>
         <p:spPr>
           <a:xfrm>
-            <a:off x="457200" y="4206240"/>
-            <a:ext cx="3474720" cy="1371600"/>
+            <a:off x="457200" y="4251960"/>
+            <a:ext cx="3547872" cy="1417320"/>
           </a:xfrm>
           <a:prstGeom prst="roundRect">
             <a:avLst/>
@@ -5835,7 +6092,7 @@
           <a:solidFill>
             <a:srgbClr val="24304E"/>
           </a:solidFill>
-          <a:ln w="15240">
+          <a:ln w="16510">
             <a:solidFill>
               <a:srgbClr val="D4A037"/>
             </a:solidFill>
@@ -5862,7 +6119,7 @@
           <a:p>
             <a:pPr algn="ctr">
               <a:lnSpc>
-                <a:spcPct val="100000"/>
+                <a:spcPct val="105000"/>
               </a:lnSpc>
             </a:pPr>
             <a:r>
@@ -5887,8 +6144,8 @@
         </p:nvSpPr>
         <p:spPr>
           <a:xfrm>
-            <a:off x="640080" y="4343400"/>
-            <a:ext cx="3108960" cy="1097280"/>
+            <a:off x="621792" y="4389120"/>
+            <a:ext cx="3218688" cy="1161288"/>
           </a:xfrm>
           <a:prstGeom prst="rect">
             <a:avLst/>
@@ -5907,7 +6164,7 @@
               </a:lnSpc>
             </a:pPr>
             <a:r>
-              <a:rPr sz="1600" b="1" i="0">
+              <a:rPr sz="1700" b="1" i="0">
                 <a:solidFill>
                   <a:srgbClr val="D4A037"/>
                 </a:solidFill>
@@ -5936,7 +6193,7 @@
                 <a:ea typeface="Microsoft YaHei"/>
                 <a:cs typeface="Microsoft YaHei"/>
               </a:rPr>
-              <a:t>方向与资源</a:t>
+              <a:t>方向指引与资源对接</a:t>
             </a:r>
           </a:p>
         </p:txBody>
@@ -5949,8 +6206,8 @@
         </p:nvSpPr>
         <p:spPr>
           <a:xfrm>
-            <a:off x="4206240" y="4206240"/>
-            <a:ext cx="3474720" cy="1371600"/>
+            <a:off x="4187952" y="4251960"/>
+            <a:ext cx="3547872" cy="1417320"/>
           </a:xfrm>
           <a:prstGeom prst="roundRect">
             <a:avLst/>
@@ -5958,7 +6215,7 @@
           <a:solidFill>
             <a:srgbClr val="24304E"/>
           </a:solidFill>
-          <a:ln w="15240">
+          <a:ln w="16510">
             <a:solidFill>
               <a:srgbClr val="D4A037"/>
             </a:solidFill>
@@ -5985,7 +6242,7 @@
           <a:p>
             <a:pPr algn="ctr">
               <a:lnSpc>
-                <a:spcPct val="100000"/>
+                <a:spcPct val="105000"/>
               </a:lnSpc>
             </a:pPr>
             <a:r>
@@ -6010,8 +6267,8 @@
         </p:nvSpPr>
         <p:spPr>
           <a:xfrm>
-            <a:off x="4389120" y="4343400"/>
-            <a:ext cx="3108960" cy="1097280"/>
+            <a:off x="4352544" y="4389120"/>
+            <a:ext cx="3218688" cy="1161288"/>
           </a:xfrm>
           <a:prstGeom prst="rect">
             <a:avLst/>
@@ -6030,7 +6287,7 @@
               </a:lnSpc>
             </a:pPr>
             <a:r>
-              <a:rPr sz="1600" b="1" i="0">
+              <a:rPr sz="1700" b="1" i="0">
                 <a:solidFill>
                   <a:srgbClr val="D4A037"/>
                 </a:solidFill>
@@ -6059,7 +6316,7 @@
                 <a:ea typeface="Microsoft YaHei"/>
                 <a:cs typeface="Microsoft YaHei"/>
               </a:rPr>
-              <a:t>真实场景验证</a:t>
+              <a:t>真实场景验证反馈</a:t>
             </a:r>
           </a:p>
         </p:txBody>
@@ -6072,8 +6329,8 @@
         </p:nvSpPr>
         <p:spPr>
           <a:xfrm>
-            <a:off x="7955279" y="4206240"/>
-            <a:ext cx="3474720" cy="1371600"/>
+            <a:off x="7918704" y="4251960"/>
+            <a:ext cx="3547872" cy="1417320"/>
           </a:xfrm>
           <a:prstGeom prst="roundRect">
             <a:avLst/>
@@ -6081,7 +6338,7 @@
           <a:solidFill>
             <a:srgbClr val="24304E"/>
           </a:solidFill>
-          <a:ln w="15240">
+          <a:ln w="16510">
             <a:solidFill>
               <a:srgbClr val="D4A037"/>
             </a:solidFill>
@@ -6108,7 +6365,7 @@
           <a:p>
             <a:pPr algn="ctr">
               <a:lnSpc>
-                <a:spcPct val="100000"/>
+                <a:spcPct val="105000"/>
               </a:lnSpc>
             </a:pPr>
             <a:r>
@@ -6133,8 +6390,8 @@
         </p:nvSpPr>
         <p:spPr>
           <a:xfrm>
-            <a:off x="8138159" y="4343400"/>
-            <a:ext cx="3108960" cy="1097280"/>
+            <a:off x="8083296" y="4389120"/>
+            <a:ext cx="3218688" cy="1161288"/>
           </a:xfrm>
           <a:prstGeom prst="rect">
             <a:avLst/>
@@ -6153,7 +6410,7 @@
               </a:lnSpc>
             </a:pPr>
             <a:r>
-              <a:rPr sz="1600" b="1" i="0">
+              <a:rPr sz="1700" b="1" i="0">
                 <a:solidFill>
                   <a:srgbClr val="D4A037"/>
                 </a:solidFill>
@@ -6182,7 +6439,7 @@
                 <a:ea typeface="Microsoft YaHei"/>
                 <a:cs typeface="Microsoft YaHei"/>
               </a:rPr>
-              <a:t>数据 / 渠道</a:t>
+              <a:t>数据源 / 渠道 / 场景</a:t>
             </a:r>
           </a:p>
         </p:txBody>
@@ -6201,7 +6458,7 @@
     <p:bg>
       <p:bgPr>
         <a:solidFill>
-          <a:srgbClr val="FFFFFF"/>
+          <a:srgbClr val="FAFBFC"/>
         </a:solidFill>
         <a:effectLst/>
       </p:bgPr>
@@ -6222,7 +6479,7 @@
         <p:spPr>
           <a:xfrm>
             <a:off x="0" y="0"/>
-            <a:ext cx="12191695" cy="960120"/>
+            <a:ext cx="12191695" cy="914400"/>
           </a:xfrm>
           <a:prstGeom prst="rect">
             <a:avLst/>
@@ -6255,7 +6512,7 @@
           <a:p>
             <a:pPr algn="ctr">
               <a:lnSpc>
-                <a:spcPct val="100000"/>
+                <a:spcPct val="105000"/>
               </a:lnSpc>
             </a:pPr>
             <a:r>
@@ -6281,7 +6538,7 @@
         <p:spPr>
           <a:xfrm>
             <a:off x="0" y="0"/>
-            <a:ext cx="128016" cy="960120"/>
+            <a:ext cx="109728" cy="914400"/>
           </a:xfrm>
           <a:prstGeom prst="rect">
             <a:avLst/>
@@ -6314,7 +6571,7 @@
           <a:p>
             <a:pPr algn="ctr">
               <a:lnSpc>
-                <a:spcPct val="100000"/>
+                <a:spcPct val="105000"/>
               </a:lnSpc>
             </a:pPr>
             <a:r>
@@ -6339,8 +6596,8 @@
         </p:nvSpPr>
         <p:spPr>
           <a:xfrm>
-            <a:off x="411480" y="109728"/>
-            <a:ext cx="10515600" cy="777240"/>
+            <a:off x="384048" y="73152"/>
+            <a:ext cx="10515600" cy="768096"/>
           </a:xfrm>
           <a:prstGeom prst="rect">
             <a:avLst/>
@@ -6380,8 +6637,8 @@
         </p:nvSpPr>
         <p:spPr>
           <a:xfrm>
-            <a:off x="411480" y="6419088"/>
-            <a:ext cx="8229600" cy="365760"/>
+            <a:off x="384048" y="6400800"/>
+            <a:ext cx="8229600" cy="347472"/>
           </a:xfrm>
           <a:prstGeom prst="rect">
             <a:avLst/>
@@ -6421,8 +6678,8 @@
         </p:nvSpPr>
         <p:spPr>
           <a:xfrm>
-            <a:off x="10332720" y="6419088"/>
-            <a:ext cx="1371600" cy="365760"/>
+            <a:off x="10241280" y="6400800"/>
+            <a:ext cx="1508760" cy="347472"/>
           </a:xfrm>
           <a:prstGeom prst="rect">
             <a:avLst/>
@@ -6462,8 +6719,8 @@
         </p:nvSpPr>
         <p:spPr>
           <a:xfrm>
-            <a:off x="457200" y="1325880"/>
-            <a:ext cx="5669280" cy="4754880"/>
+            <a:off x="457200" y="1005840"/>
+            <a:ext cx="5577840" cy="5303520"/>
           </a:xfrm>
           <a:prstGeom prst="rect">
             <a:avLst/>
@@ -6520,7 +6777,7 @@
                 <a:ea typeface="Microsoft YaHei"/>
                 <a:cs typeface="Microsoft YaHei"/>
               </a:rPr>
-              <a:t>• 《金融机构产品适当性管理办法》明确要求向投资者充分披露</a:t>
+              <a:t>• 《金融机构产品适当性管理办法》明确要求向投资者充分披露关键信息</a:t>
             </a:r>
           </a:p>
           <a:p>
@@ -6529,7 +6786,7 @@
                 <a:spcPct val="115000"/>
               </a:lnSpc>
               <a:spcBef>
-                <a:spcPts val="1400"/>
+                <a:spcPts val="1200"/>
               </a:spcBef>
               <a:spcAft>
                 <a:spcPts val="300"/>
@@ -6544,7 +6801,7 @@
                 <a:ea typeface="Microsoft YaHei"/>
                 <a:cs typeface="Microsoft YaHei"/>
               </a:rPr>
-              <a:t>• 技术成熟：大模型长文本 / 多模态 / Agent 编排能力已可用</a:t>
+              <a:t>• 技术成熟：大模型长文本理解 / 多模态 / Agent 编排能力已商用化</a:t>
             </a:r>
           </a:p>
           <a:p>
@@ -6568,7 +6825,7 @@
                 <a:ea typeface="Microsoft YaHei"/>
                 <a:cs typeface="Microsoft YaHei"/>
               </a:rPr>
-              <a:t>• 过去靠人工读几十页说明书，现在可由 Agent 自动完成</a:t>
+              <a:t>• 过去靠人工逐行阅读几十页说明书，现在可由 Agent 自动完成结构化提取</a:t>
             </a:r>
           </a:p>
           <a:p>
@@ -6577,7 +6834,7 @@
                 <a:spcPct val="115000"/>
               </a:lnSpc>
               <a:spcBef>
-                <a:spcPts val="1400"/>
+                <a:spcPts val="1200"/>
               </a:spcBef>
               <a:spcAft>
                 <a:spcPts val="300"/>
@@ -6592,7 +6849,7 @@
                 <a:ea typeface="Microsoft YaHei"/>
                 <a:cs typeface="Microsoft YaHei"/>
               </a:rPr>
-              <a:t>• 两股力量在「现在」交汇 —— 正是入场的时机</a:t>
+              <a:t>• 两股力量在「现在」交汇 —— 正是入场的最佳时机</a:t>
             </a:r>
           </a:p>
         </p:txBody>
@@ -6605,8 +6862,8 @@
         </p:nvSpPr>
         <p:spPr>
           <a:xfrm>
-            <a:off x="457200" y="2057400"/>
-            <a:ext cx="2331720" cy="1554480"/>
+            <a:off x="6583680" y="2011680"/>
+            <a:ext cx="2423160" cy="1508760"/>
           </a:xfrm>
           <a:prstGeom prst="roundRect">
             <a:avLst/>
@@ -6639,7 +6896,7 @@
           <a:p>
             <a:pPr algn="ctr">
               <a:lnSpc>
-                <a:spcPct val="100000"/>
+                <a:spcPct val="105000"/>
               </a:lnSpc>
             </a:pPr>
             <a:r>
@@ -6657,7 +6914,7 @@
           <a:p>
             <a:pPr algn="ctr">
               <a:lnSpc>
-                <a:spcPct val="100000"/>
+                <a:spcPct val="105000"/>
               </a:lnSpc>
             </a:pPr>
             <a:r>
@@ -6670,6 +6927,24 @@
                 <a:cs typeface="Microsoft YaHei"/>
               </a:rPr>
               <a:t>《适当性管理办法》</a:t>
+            </a:r>
+          </a:p>
+          <a:p>
+            <a:pPr algn="ctr">
+              <a:lnSpc>
+                <a:spcPct val="105000"/>
+              </a:lnSpc>
+            </a:pPr>
+            <a:r>
+              <a:rPr sz="1300" b="1" i="0">
+                <a:solidFill>
+                  <a:srgbClr val="FFFFFF"/>
+                </a:solidFill>
+                <a:latin typeface="Microsoft YaHei"/>
+                <a:ea typeface="Microsoft YaHei"/>
+                <a:cs typeface="Microsoft YaHei"/>
+              </a:rPr>
+              <a:t>充分披露要求</a:t>
             </a:r>
           </a:p>
         </p:txBody>
@@ -6682,8 +6957,8 @@
         </p:nvSpPr>
         <p:spPr>
           <a:xfrm>
-            <a:off x="9326880" y="2057400"/>
-            <a:ext cx="2331720" cy="1554480"/>
+            <a:off x="9875520" y="2011680"/>
+            <a:ext cx="2423160" cy="1508760"/>
           </a:xfrm>
           <a:prstGeom prst="roundRect">
             <a:avLst/>
@@ -6716,7 +6991,7 @@
           <a:p>
             <a:pPr algn="ctr">
               <a:lnSpc>
-                <a:spcPct val="100000"/>
+                <a:spcPct val="105000"/>
               </a:lnSpc>
             </a:pPr>
             <a:r>
@@ -6734,7 +7009,7 @@
           <a:p>
             <a:pPr algn="ctr">
               <a:lnSpc>
-                <a:spcPct val="100000"/>
+                <a:spcPct val="105000"/>
               </a:lnSpc>
             </a:pPr>
             <a:r>
@@ -6747,6 +7022,24 @@
                 <a:cs typeface="Microsoft YaHei"/>
               </a:rPr>
               <a:t>大模型 / Agent</a:t>
+            </a:r>
+          </a:p>
+          <a:p>
+            <a:pPr algn="ctr">
+              <a:lnSpc>
+                <a:spcPct val="105000"/>
+              </a:lnSpc>
+            </a:pPr>
+            <a:r>
+              <a:rPr sz="1300" b="1" i="0">
+                <a:solidFill>
+                  <a:srgbClr val="FFFFFF"/>
+                </a:solidFill>
+                <a:latin typeface="Microsoft YaHei"/>
+                <a:ea typeface="Microsoft YaHei"/>
+                <a:cs typeface="Microsoft YaHei"/>
+              </a:rPr>
+              <a:t>长文本能力</a:t>
             </a:r>
           </a:p>
         </p:txBody>
@@ -6759,7 +7052,7 @@
         </p:nvSpPr>
         <p:spPr>
           <a:xfrm>
-            <a:off x="5074920" y="2148840"/>
+            <a:off x="8138160" y="2103120"/>
             <a:ext cx="1920240" cy="1920240"/>
           </a:xfrm>
           <a:prstGeom prst="ellipse">
@@ -6793,11 +7086,11 @@
           <a:p>
             <a:pPr algn="ctr">
               <a:lnSpc>
-                <a:spcPct val="100000"/>
-              </a:lnSpc>
-            </a:pPr>
-            <a:r>
-              <a:rPr sz="1500" b="1" i="0">
+                <a:spcPct val="105000"/>
+              </a:lnSpc>
+            </a:pPr>
+            <a:r>
+              <a:rPr sz="1600" b="1" i="0">
                 <a:solidFill>
                   <a:srgbClr val="FFFFFF"/>
                 </a:solidFill>
@@ -6811,11 +7104,11 @@
           <a:p>
             <a:pPr algn="ctr">
               <a:lnSpc>
-                <a:spcPct val="100000"/>
-              </a:lnSpc>
-            </a:pPr>
-            <a:r>
-              <a:rPr sz="1500" b="1" i="0">
+                <a:spcPct val="105000"/>
+              </a:lnSpc>
+            </a:pPr>
+            <a:r>
+              <a:rPr sz="1600" b="1" i="0">
                 <a:solidFill>
                   <a:srgbClr val="FFFFFF"/>
                 </a:solidFill>
@@ -6836,8 +7129,8 @@
         </p:nvSpPr>
         <p:spPr>
           <a:xfrm>
-            <a:off x="2880360" y="2697480"/>
-            <a:ext cx="2103120" cy="457200"/>
+            <a:off x="9098280" y="2633472"/>
+            <a:ext cx="2011680" cy="475488"/>
           </a:xfrm>
           <a:prstGeom prst="rightArrow">
             <a:avLst/>
@@ -6880,8 +7173,8 @@
         </p:nvSpPr>
         <p:spPr>
           <a:xfrm>
-            <a:off x="7178040" y="2697480"/>
-            <a:ext cx="2103120" cy="457200"/>
+            <a:off x="12390120" y="2633472"/>
+            <a:ext cx="2011680" cy="475488"/>
           </a:xfrm>
           <a:prstGeom prst="rightArrow">
             <a:avLst/>
@@ -6924,8 +7217,8 @@
         </p:nvSpPr>
         <p:spPr>
           <a:xfrm>
-            <a:off x="457200" y="4754880"/>
-            <a:ext cx="5486400" cy="457200"/>
+            <a:off x="6583680" y="4434840"/>
+            <a:ext cx="4967935" cy="502920"/>
           </a:xfrm>
           <a:prstGeom prst="rect">
             <a:avLst/>
@@ -6952,7 +7245,7 @@
                 <a:ea typeface="Microsoft YaHei"/>
                 <a:cs typeface="Microsoft YaHei"/>
               </a:rPr>
-              <a:t>监管 × 技术 交汇 → 消费者需要「购买前信息公平」</a:t>
+              <a:t>监管 × 技术 交汇 → 消费者需要「购买前信息公平」工具</a:t>
             </a:r>
           </a:p>
         </p:txBody>
@@ -6971,7 +7264,7 @@
     <p:bg>
       <p:bgPr>
         <a:solidFill>
-          <a:srgbClr val="FFFFFF"/>
+          <a:srgbClr val="FAFBFC"/>
         </a:solidFill>
         <a:effectLst/>
       </p:bgPr>
@@ -6992,7 +7285,7 @@
         <p:spPr>
           <a:xfrm>
             <a:off x="0" y="0"/>
-            <a:ext cx="12191695" cy="960120"/>
+            <a:ext cx="12191695" cy="914400"/>
           </a:xfrm>
           <a:prstGeom prst="rect">
             <a:avLst/>
@@ -7025,7 +7318,7 @@
           <a:p>
             <a:pPr algn="ctr">
               <a:lnSpc>
-                <a:spcPct val="100000"/>
+                <a:spcPct val="105000"/>
               </a:lnSpc>
             </a:pPr>
             <a:r>
@@ -7051,7 +7344,7 @@
         <p:spPr>
           <a:xfrm>
             <a:off x="0" y="0"/>
-            <a:ext cx="128016" cy="960120"/>
+            <a:ext cx="109728" cy="914400"/>
           </a:xfrm>
           <a:prstGeom prst="rect">
             <a:avLst/>
@@ -7084,7 +7377,7 @@
           <a:p>
             <a:pPr algn="ctr">
               <a:lnSpc>
-                <a:spcPct val="100000"/>
+                <a:spcPct val="105000"/>
               </a:lnSpc>
             </a:pPr>
             <a:r>
@@ -7109,8 +7402,8 @@
         </p:nvSpPr>
         <p:spPr>
           <a:xfrm>
-            <a:off x="411480" y="109728"/>
-            <a:ext cx="10515600" cy="777240"/>
+            <a:off x="384048" y="73152"/>
+            <a:ext cx="10515600" cy="768096"/>
           </a:xfrm>
           <a:prstGeom prst="rect">
             <a:avLst/>
@@ -7150,8 +7443,8 @@
         </p:nvSpPr>
         <p:spPr>
           <a:xfrm>
-            <a:off x="411480" y="6419088"/>
-            <a:ext cx="8229600" cy="365760"/>
+            <a:off x="384048" y="6400800"/>
+            <a:ext cx="8229600" cy="347472"/>
           </a:xfrm>
           <a:prstGeom prst="rect">
             <a:avLst/>
@@ -7191,8 +7484,8 @@
         </p:nvSpPr>
         <p:spPr>
           <a:xfrm>
-            <a:off x="10332720" y="6419088"/>
-            <a:ext cx="1371600" cy="365760"/>
+            <a:off x="10241280" y="6400800"/>
+            <a:ext cx="1508760" cy="347472"/>
           </a:xfrm>
           <a:prstGeom prst="rect">
             <a:avLst/>
@@ -7232,8 +7525,8 @@
         </p:nvSpPr>
         <p:spPr>
           <a:xfrm>
-            <a:off x="457200" y="1325880"/>
-            <a:ext cx="5669280" cy="4754880"/>
+            <a:off x="457200" y="1005840"/>
+            <a:ext cx="5577840" cy="2560320"/>
           </a:xfrm>
           <a:prstGeom prst="rect">
             <a:avLst/>
@@ -7299,7 +7592,7 @@
                 <a:spcPct val="115000"/>
               </a:lnSpc>
               <a:spcBef>
-                <a:spcPts val="1200"/>
+                <a:spcPts val="1000"/>
               </a:spcBef>
               <a:spcAft>
                 <a:spcPts val="300"/>
@@ -7314,7 +7607,7 @@
                 <a:ea typeface="Microsoft YaHei"/>
                 <a:cs typeface="Microsoft YaHei"/>
               </a:rPr>
-              <a:t>• 宣传海报几秒讲收益，风险与退出条件却被弱化</a:t>
+              <a:t>• 宣传海报几秒讲收益，风险与退出条件却被弱化或遗漏</a:t>
             </a:r>
           </a:p>
           <a:p>
@@ -7347,7 +7640,7 @@
                 <a:spcPct val="115000"/>
               </a:lnSpc>
               <a:spcBef>
-                <a:spcPts val="1200"/>
+                <a:spcPts val="1000"/>
               </a:spcBef>
               <a:spcAft>
                 <a:spcPts val="300"/>
@@ -7362,27 +7655,51 @@
                 <a:ea typeface="Microsoft YaHei"/>
                 <a:cs typeface="Microsoft YaHei"/>
               </a:rPr>
-              <a:t>• 普通人：找不到、看不懂、比不对</a:t>
-            </a:r>
-          </a:p>
-        </p:txBody>
-      </p:sp>
-      <p:sp>
-        <p:nvSpPr>
-          <p:cNvPr id="8" name="Rounded Rectangle 7"/>
+              <a:t>• 普通人面对金融文件：找不到、看不懂、比不对</a:t>
+            </a:r>
+          </a:p>
+        </p:txBody>
+      </p:sp>
+      <p:pic>
+        <p:nvPicPr>
+          <p:cNvPr id="8" name="Picture 7" descr="说明书脱敏页.png"/>
+          <p:cNvPicPr>
+            <a:picLocks noChangeAspect="1"/>
+          </p:cNvPicPr>
+          <p:nvPr/>
+        </p:nvPicPr>
+        <p:blipFill>
+          <a:blip r:embed="rId2"/>
+          <a:stretch>
+            <a:fillRect/>
+          </a:stretch>
+        </p:blipFill>
+        <p:spPr>
+          <a:xfrm>
+            <a:off x="6537960" y="1005840"/>
+            <a:ext cx="3487549036934" cy="4933151423999"/>
+          </a:xfrm>
+          <a:prstGeom prst="rect">
+            <a:avLst/>
+          </a:prstGeom>
+        </p:spPr>
+      </p:pic>
+      <p:sp>
+        <p:nvSpPr>
+          <p:cNvPr id="9" name="Rounded Rectangle 8"/>
           <p:cNvSpPr/>
           <p:nvPr/>
         </p:nvSpPr>
         <p:spPr>
           <a:xfrm>
-            <a:off x="6675120" y="1417320"/>
-            <a:ext cx="2194560" cy="868680"/>
+            <a:off x="6537960" y="6035040"/>
+            <a:ext cx="5059375" cy="411480"/>
           </a:xfrm>
           <a:prstGeom prst="roundRect">
             <a:avLst/>
           </a:prstGeom>
           <a:solidFill>
-            <a:srgbClr val="F9A828"/>
+            <a:srgbClr val="F0E4C8"/>
           </a:solidFill>
           <a:ln>
             <a:noFill/>
@@ -7409,11 +7726,11 @@
           <a:p>
             <a:pPr algn="ctr">
               <a:lnSpc>
-                <a:spcPct val="100000"/>
-              </a:lnSpc>
-            </a:pPr>
-            <a:r>
-              <a:rPr sz="1300" b="1" i="0">
+                <a:spcPct val="105000"/>
+              </a:lnSpc>
+            </a:pPr>
+            <a:r>
+              <a:rPr sz="1100" b="0" i="0">
                 <a:solidFill>
                   <a:srgbClr val="222833"/>
                 </a:solidFill>
@@ -7421,266 +7738,7 @@
                 <a:ea typeface="Microsoft YaHei"/>
                 <a:cs typeface="Microsoft YaHei"/>
               </a:rPr>
-              <a:t>保本</a:t>
-            </a:r>
-          </a:p>
-        </p:txBody>
-      </p:sp>
-      <p:sp>
-        <p:nvSpPr>
-          <p:cNvPr id="9" name="Rounded Rectangle 8"/>
-          <p:cNvSpPr/>
-          <p:nvPr/>
-        </p:nvSpPr>
-        <p:spPr>
-          <a:xfrm>
-            <a:off x="9555480" y="1417320"/>
-            <a:ext cx="2194560" cy="868680"/>
-          </a:xfrm>
-          <a:prstGeom prst="roundRect">
-            <a:avLst/>
-          </a:prstGeom>
-          <a:solidFill>
-            <a:srgbClr val="F9A828"/>
-          </a:solidFill>
-          <a:ln>
-            <a:noFill/>
-          </a:ln>
-          <a:effectLst/>
-        </p:spPr>
-        <p:style>
-          <a:lnRef idx="1">
-            <a:schemeClr val="accent1"/>
-          </a:lnRef>
-          <a:fillRef idx="3">
-            <a:schemeClr val="accent1"/>
-          </a:fillRef>
-          <a:effectRef idx="2">
-            <a:schemeClr val="accent1"/>
-          </a:effectRef>
-          <a:fontRef idx="minor">
-            <a:schemeClr val="lt1"/>
-          </a:fontRef>
-        </p:style>
-        <p:txBody>
-          <a:bodyPr rtlCol="0" anchor="ctr" wrap="square" lIns="54864" rIns="54864" tIns="27432" bIns="27432"/>
-          <a:lstStyle/>
-          <a:p>
-            <a:pPr algn="ctr">
-              <a:lnSpc>
-                <a:spcPct val="100000"/>
-              </a:lnSpc>
-            </a:pPr>
-            <a:r>
-              <a:rPr sz="1300" b="1" i="0">
-                <a:solidFill>
-                  <a:srgbClr val="222833"/>
-                </a:solidFill>
-                <a:latin typeface="Microsoft YaHei"/>
-                <a:ea typeface="Microsoft YaHei"/>
-                <a:cs typeface="Microsoft YaHei"/>
-              </a:rPr>
-              <a:t>业绩比较基准</a:t>
-            </a:r>
-          </a:p>
-        </p:txBody>
-      </p:sp>
-      <p:sp>
-        <p:nvSpPr>
-          <p:cNvPr id="10" name="Rounded Rectangle 9"/>
-          <p:cNvSpPr/>
-          <p:nvPr/>
-        </p:nvSpPr>
-        <p:spPr>
-          <a:xfrm>
-            <a:off x="6675120" y="3200400"/>
-            <a:ext cx="2194560" cy="868680"/>
-          </a:xfrm>
-          <a:prstGeom prst="roundRect">
-            <a:avLst/>
-          </a:prstGeom>
-          <a:solidFill>
-            <a:srgbClr val="F9A828"/>
-          </a:solidFill>
-          <a:ln>
-            <a:noFill/>
-          </a:ln>
-          <a:effectLst/>
-        </p:spPr>
-        <p:style>
-          <a:lnRef idx="1">
-            <a:schemeClr val="accent1"/>
-          </a:lnRef>
-          <a:fillRef idx="3">
-            <a:schemeClr val="accent1"/>
-          </a:fillRef>
-          <a:effectRef idx="2">
-            <a:schemeClr val="accent1"/>
-          </a:effectRef>
-          <a:fontRef idx="minor">
-            <a:schemeClr val="lt1"/>
-          </a:fontRef>
-        </p:style>
-        <p:txBody>
-          <a:bodyPr rtlCol="0" anchor="ctr" wrap="square" lIns="54864" rIns="54864" tIns="27432" bIns="27432"/>
-          <a:lstStyle/>
-          <a:p>
-            <a:pPr algn="ctr">
-              <a:lnSpc>
-                <a:spcPct val="100000"/>
-              </a:lnSpc>
-            </a:pPr>
-            <a:r>
-              <a:rPr sz="1300" b="1" i="0">
-                <a:solidFill>
-                  <a:srgbClr val="222833"/>
-                </a:solidFill>
-                <a:latin typeface="Microsoft YaHei"/>
-                <a:ea typeface="Microsoft YaHei"/>
-                <a:cs typeface="Microsoft YaHei"/>
-              </a:rPr>
-              <a:t>资金锁定期</a:t>
-            </a:r>
-          </a:p>
-        </p:txBody>
-      </p:sp>
-      <p:sp>
-        <p:nvSpPr>
-          <p:cNvPr id="11" name="Rounded Rectangle 10"/>
-          <p:cNvSpPr/>
-          <p:nvPr/>
-        </p:nvSpPr>
-        <p:spPr>
-          <a:xfrm>
-            <a:off x="9555480" y="3200400"/>
-            <a:ext cx="2194560" cy="868680"/>
-          </a:xfrm>
-          <a:prstGeom prst="roundRect">
-            <a:avLst/>
-          </a:prstGeom>
-          <a:solidFill>
-            <a:srgbClr val="F9A828"/>
-          </a:solidFill>
-          <a:ln>
-            <a:noFill/>
-          </a:ln>
-          <a:effectLst/>
-        </p:spPr>
-        <p:style>
-          <a:lnRef idx="1">
-            <a:schemeClr val="accent1"/>
-          </a:lnRef>
-          <a:fillRef idx="3">
-            <a:schemeClr val="accent1"/>
-          </a:fillRef>
-          <a:effectRef idx="2">
-            <a:schemeClr val="accent1"/>
-          </a:effectRef>
-          <a:fontRef idx="minor">
-            <a:schemeClr val="lt1"/>
-          </a:fontRef>
-        </p:style>
-        <p:txBody>
-          <a:bodyPr rtlCol="0" anchor="ctr" wrap="square" lIns="54864" rIns="54864" tIns="27432" bIns="27432"/>
-          <a:lstStyle/>
-          <a:p>
-            <a:pPr algn="ctr">
-              <a:lnSpc>
-                <a:spcPct val="100000"/>
-              </a:lnSpc>
-            </a:pPr>
-            <a:r>
-              <a:rPr sz="1300" b="1" i="0">
-                <a:solidFill>
-                  <a:srgbClr val="222833"/>
-                </a:solidFill>
-                <a:latin typeface="Microsoft YaHei"/>
-                <a:ea typeface="Microsoft YaHei"/>
-                <a:cs typeface="Microsoft YaHei"/>
-              </a:rPr>
-              <a:t>费率</a:t>
-            </a:r>
-          </a:p>
-        </p:txBody>
-      </p:sp>
-      <p:sp>
-        <p:nvSpPr>
-          <p:cNvPr id="12" name="TextBox 11"/>
-          <p:cNvSpPr txBox="1"/>
-          <p:nvPr/>
-        </p:nvSpPr>
-        <p:spPr>
-          <a:xfrm>
-            <a:off x="7863840" y="2240280"/>
-            <a:ext cx="1737360" cy="1280160"/>
-          </a:xfrm>
-          <a:prstGeom prst="rect">
-            <a:avLst/>
-          </a:prstGeom>
-          <a:noFill/>
-        </p:spPr>
-        <p:txBody>
-          <a:bodyPr wrap="square" anchor="ctr" lIns="36576" rIns="36576" tIns="18288" bIns="18288">
-            <a:spAutoFit/>
-          </a:bodyPr>
-          <a:lstStyle/>
-          <a:p>
-            <a:pPr algn="ctr">
-              <a:lnSpc>
-                <a:spcPct val="115000"/>
-              </a:lnSpc>
-            </a:pPr>
-            <a:r>
-              <a:rPr sz="6000" b="1" i="0">
-                <a:solidFill>
-                  <a:srgbClr val="C62828"/>
-                </a:solidFill>
-                <a:latin typeface="Microsoft YaHei"/>
-                <a:ea typeface="Microsoft YaHei"/>
-                <a:cs typeface="Microsoft YaHei"/>
-              </a:rPr>
-              <a:t>?</a:t>
-            </a:r>
-          </a:p>
-        </p:txBody>
-      </p:sp>
-      <p:sp>
-        <p:nvSpPr>
-          <p:cNvPr id="13" name="TextBox 12"/>
-          <p:cNvSpPr txBox="1"/>
-          <p:nvPr/>
-        </p:nvSpPr>
-        <p:spPr>
-          <a:xfrm>
-            <a:off x="6675120" y="4206240"/>
-            <a:ext cx="5120640" cy="457200"/>
-          </a:xfrm>
-          <a:prstGeom prst="rect">
-            <a:avLst/>
-          </a:prstGeom>
-          <a:noFill/>
-        </p:spPr>
-        <p:txBody>
-          <a:bodyPr wrap="square" anchor="t" lIns="36576" rIns="36576" tIns="18288" bIns="18288">
-            <a:spAutoFit/>
-          </a:bodyPr>
-          <a:lstStyle/>
-          <a:p>
-            <a:pPr algn="ctr">
-              <a:lnSpc>
-                <a:spcPct val="115000"/>
-              </a:lnSpc>
-            </a:pPr>
-            <a:r>
-              <a:rPr sz="1200" b="0" i="0">
-                <a:solidFill>
-                  <a:srgbClr val="5B6372"/>
-                </a:solidFill>
-                <a:latin typeface="Microsoft YaHei"/>
-                <a:ea typeface="Microsoft YaHei"/>
-                <a:cs typeface="Microsoft YaHei"/>
-              </a:rPr>
-              <a:t>普通人在几十页里，到底要去哪找这些关键信息？</a:t>
+              <a:t>↑ 模拟理财产品说明书第 2 页：关键条件散落各处，普通人难以快速定位</a:t>
             </a:r>
           </a:p>
         </p:txBody>
@@ -7699,7 +7757,7 @@
     <p:bg>
       <p:bgPr>
         <a:solidFill>
-          <a:srgbClr val="FFFFFF"/>
+          <a:srgbClr val="FAFBFC"/>
         </a:solidFill>
         <a:effectLst/>
       </p:bgPr>
@@ -7720,7 +7778,7 @@
         <p:spPr>
           <a:xfrm>
             <a:off x="0" y="0"/>
-            <a:ext cx="12191695" cy="960120"/>
+            <a:ext cx="12191695" cy="914400"/>
           </a:xfrm>
           <a:prstGeom prst="rect">
             <a:avLst/>
@@ -7753,7 +7811,7 @@
           <a:p>
             <a:pPr algn="ctr">
               <a:lnSpc>
-                <a:spcPct val="100000"/>
+                <a:spcPct val="105000"/>
               </a:lnSpc>
             </a:pPr>
             <a:r>
@@ -7779,7 +7837,7 @@
         <p:spPr>
           <a:xfrm>
             <a:off x="0" y="0"/>
-            <a:ext cx="128016" cy="960120"/>
+            <a:ext cx="109728" cy="914400"/>
           </a:xfrm>
           <a:prstGeom prst="rect">
             <a:avLst/>
@@ -7812,7 +7870,7 @@
           <a:p>
             <a:pPr algn="ctr">
               <a:lnSpc>
-                <a:spcPct val="100000"/>
+                <a:spcPct val="105000"/>
               </a:lnSpc>
             </a:pPr>
             <a:r>
@@ -7837,8 +7895,8 @@
         </p:nvSpPr>
         <p:spPr>
           <a:xfrm>
-            <a:off x="411480" y="109728"/>
-            <a:ext cx="10515600" cy="777240"/>
+            <a:off x="384048" y="73152"/>
+            <a:ext cx="10515600" cy="768096"/>
           </a:xfrm>
           <a:prstGeom prst="rect">
             <a:avLst/>
@@ -7878,8 +7936,8 @@
         </p:nvSpPr>
         <p:spPr>
           <a:xfrm>
-            <a:off x="411480" y="6419088"/>
-            <a:ext cx="8229600" cy="365760"/>
+            <a:off x="384048" y="6400800"/>
+            <a:ext cx="8229600" cy="347472"/>
           </a:xfrm>
           <a:prstGeom prst="rect">
             <a:avLst/>
@@ -7919,8 +7977,8 @@
         </p:nvSpPr>
         <p:spPr>
           <a:xfrm>
-            <a:off x="10332720" y="6419088"/>
-            <a:ext cx="1371600" cy="365760"/>
+            <a:off x="10241280" y="6400800"/>
+            <a:ext cx="1508760" cy="347472"/>
           </a:xfrm>
           <a:prstGeom prst="rect">
             <a:avLst/>
@@ -7960,8 +8018,8 @@
         </p:nvSpPr>
         <p:spPr>
           <a:xfrm>
-            <a:off x="457200" y="1280160"/>
-            <a:ext cx="5486400" cy="1828800"/>
+            <a:off x="457200" y="1005840"/>
+            <a:ext cx="5577840" cy="1645920"/>
           </a:xfrm>
           <a:prstGeom prst="rect">
             <a:avLst/>
@@ -8031,8 +8089,8 @@
         </p:nvSpPr>
         <p:spPr>
           <a:xfrm>
-            <a:off x="457200" y="3200400"/>
-            <a:ext cx="5486400" cy="2743200"/>
+            <a:off x="457200" y="3246120"/>
+            <a:ext cx="5577840" cy="2926080"/>
           </a:xfrm>
           <a:prstGeom prst="rect">
             <a:avLst/>
@@ -8062,7 +8120,7 @@
                 <a:ea typeface="Microsoft YaHei"/>
                 <a:cs typeface="Microsoft YaHei"/>
               </a:rPr>
-              <a:t>5 款参照产品（示意）</a:t>
+              <a:t>5 款参照产品（公开检索示意）</a:t>
             </a:r>
           </a:p>
           <a:p>
@@ -8083,7 +8141,7 @@
                 <a:ea typeface="Microsoft YaHei"/>
                 <a:cs typeface="Microsoft YaHei"/>
               </a:rPr>
-              <a:t>• Explain Documents（文档通俗解释）</a:t>
+              <a:t>• Explain Documents —— 通用文档通俗解释</a:t>
             </a:r>
           </a:p>
           <a:p>
@@ -8104,7 +8162,7 @@
                 <a:ea typeface="Microsoft YaHei"/>
                 <a:cs typeface="Microsoft YaHei"/>
               </a:rPr>
-              <a:t>• BeforeYouPay（合同费用提取）</a:t>
+              <a:t>• BeforeYouPay —— 合同费用提取</a:t>
             </a:r>
           </a:p>
           <a:p>
@@ -8125,7 +8183,7 @@
                 <a:ea typeface="Microsoft YaHei"/>
                 <a:cs typeface="Microsoft YaHei"/>
               </a:rPr>
-              <a:t>• Contract Clarity Agent（风险分级）</a:t>
+              <a:t>• Contract Clarity Agent —— 风险分级</a:t>
             </a:r>
           </a:p>
           <a:p>
@@ -8146,7 +8204,7 @@
                 <a:ea typeface="Microsoft YaHei"/>
                 <a:cs typeface="Microsoft YaHei"/>
               </a:rPr>
-              <a:t>• FINRA Fund Analyzer（官方费用分析）</a:t>
+              <a:t>• FINRA Fund Analyzer —— 官方基金费用分析</a:t>
             </a:r>
           </a:p>
           <a:p>
@@ -8167,7 +8225,7 @@
                 <a:ea typeface="Microsoft YaHei"/>
                 <a:cs typeface="Microsoft YaHei"/>
               </a:rPr>
-              <a:t>• Financial Content Assistant（金融问答）</a:t>
+              <a:t>• Financial Content Assistant —— 金融 RAG 问答</a:t>
             </a:r>
           </a:p>
           <a:p>
@@ -8176,7 +8234,7 @@
                 <a:spcPct val="115000"/>
               </a:lnSpc>
               <a:spcBef>
-                <a:spcPts val="800"/>
+                <a:spcPts val="600"/>
               </a:spcBef>
             </a:pPr>
             <a:r>
@@ -8188,7 +8246,7 @@
                 <a:ea typeface="Microsoft YaHei"/>
                 <a:cs typeface="Microsoft YaHei"/>
               </a:rPr>
-              <a:t>⚠️ 竞品能力为公开信息示意，以实际为准</a:t>
+              <a:t>⚠️ 竞品能力基于公开信息，以实际为准</a:t>
             </a:r>
           </a:p>
         </p:txBody>
@@ -8202,8 +8260,8 @@
           <p:nvPr/>
         </p:nvGraphicFramePr>
         <p:xfrm>
-          <a:off x="6309360" y="1325880"/>
-          <a:ext cx="5394960" cy="4206240"/>
+          <a:off x="6400800" y="1005840"/>
+          <a:ext cx="5532120" cy="4160520"/>
         </p:xfrm>
         <a:graphic>
           <a:graphicData uri="http://schemas.openxmlformats.org/drawingml/2006/table">
@@ -8212,14 +8270,14 @@
                 <a:tableStyleId>{5C22544A-7EE6-4342-B048-85BDC9FD1C3A}</a:tableStyleId>
               </a:tblPr>
               <a:tblGrid>
-                <a:gridCol w="1920240"/>
-                <a:gridCol w="694944"/>
-                <a:gridCol w="694944"/>
-                <a:gridCol w="694944"/>
-                <a:gridCol w="694944"/>
-                <a:gridCol w="694944"/>
+                <a:gridCol w="1965960"/>
+                <a:gridCol w="713232"/>
+                <a:gridCol w="713232"/>
+                <a:gridCol w="713232"/>
+                <a:gridCol w="713232"/>
+                <a:gridCol w="713232"/>
               </a:tblGrid>
-              <a:tr h="600891">
+              <a:tr h="594360">
                 <a:tc>
                   <a:txBody>
                     <a:bodyPr/>
@@ -8371,7 +8429,7 @@
                   </a:tcPr>
                 </a:tc>
               </a:tr>
-              <a:tr h="600891">
+              <a:tr h="594360">
                 <a:tc>
                   <a:txBody>
                     <a:bodyPr/>
@@ -8387,7 +8445,7 @@
                           <a:ea typeface="Microsoft YaHei"/>
                           <a:cs typeface="Microsoft YaHei"/>
                         </a:rPr>
-                        <a:t>Explain Documents</a:t>
+                        <a:t>Explain Docs</a:t>
                       </a:r>
                     </a:p>
                   </a:txBody>
@@ -8523,7 +8581,7 @@
                   </a:tcPr>
                 </a:tc>
               </a:tr>
-              <a:tr h="600891">
+              <a:tr h="594360">
                 <a:tc>
                   <a:txBody>
                     <a:bodyPr/>
@@ -8675,7 +8733,7 @@
                   </a:tcPr>
                 </a:tc>
               </a:tr>
-              <a:tr h="600891">
+              <a:tr h="594360">
                 <a:tc>
                   <a:txBody>
                     <a:bodyPr/>
@@ -8827,7 +8885,7 @@
                   </a:tcPr>
                 </a:tc>
               </a:tr>
-              <a:tr h="600891">
+              <a:tr h="594360">
                 <a:tc>
                   <a:txBody>
                     <a:bodyPr/>
@@ -8979,7 +9037,7 @@
                   </a:tcPr>
                 </a:tc>
               </a:tr>
-              <a:tr h="600891">
+              <a:tr h="594360">
                 <a:tc>
                   <a:txBody>
                     <a:bodyPr/>
@@ -9131,7 +9189,7 @@
                   </a:tcPr>
                 </a:tc>
               </a:tr>
-              <a:tr h="600894">
+              <a:tr h="594360">
                 <a:tc>
                   <a:txBody>
                     <a:bodyPr/>
@@ -9295,8 +9353,8 @@
         </p:nvSpPr>
         <p:spPr>
           <a:xfrm>
-            <a:off x="6309360" y="5623560"/>
-            <a:ext cx="5394960" cy="365760"/>
+            <a:off x="6400800" y="6126480"/>
+            <a:ext cx="5333695" cy="347472"/>
           </a:xfrm>
           <a:prstGeom prst="rect">
             <a:avLst/>
@@ -9323,7 +9381,7 @@
                 <a:ea typeface="Microsoft YaHei"/>
                 <a:cs typeface="Microsoft YaHei"/>
               </a:rPr>
-              <a:t>明白金 = 把能力组合到「消费者购买前信息公平」细分场景</a:t>
+              <a:t>明白金 = 把「上传+对比+引用+不推荐+聚焦购买前」组合到细分场景</a:t>
             </a:r>
           </a:p>
         </p:txBody>
@@ -9342,7 +9400,7 @@
     <p:bg>
       <p:bgPr>
         <a:solidFill>
-          <a:srgbClr val="FFFFFF"/>
+          <a:srgbClr val="FAFBFC"/>
         </a:solidFill>
         <a:effectLst/>
       </p:bgPr>
@@ -9363,7 +9421,7 @@
         <p:spPr>
           <a:xfrm>
             <a:off x="0" y="0"/>
-            <a:ext cx="12191695" cy="960120"/>
+            <a:ext cx="12191695" cy="914400"/>
           </a:xfrm>
           <a:prstGeom prst="rect">
             <a:avLst/>
@@ -9396,7 +9454,7 @@
           <a:p>
             <a:pPr algn="ctr">
               <a:lnSpc>
-                <a:spcPct val="100000"/>
+                <a:spcPct val="105000"/>
               </a:lnSpc>
             </a:pPr>
             <a:r>
@@ -9422,7 +9480,7 @@
         <p:spPr>
           <a:xfrm>
             <a:off x="0" y="0"/>
-            <a:ext cx="128016" cy="960120"/>
+            <a:ext cx="109728" cy="914400"/>
           </a:xfrm>
           <a:prstGeom prst="rect">
             <a:avLst/>
@@ -9455,7 +9513,7 @@
           <a:p>
             <a:pPr algn="ctr">
               <a:lnSpc>
-                <a:spcPct val="100000"/>
+                <a:spcPct val="105000"/>
               </a:lnSpc>
             </a:pPr>
             <a:r>
@@ -9480,8 +9538,8 @@
         </p:nvSpPr>
         <p:spPr>
           <a:xfrm>
-            <a:off x="411480" y="109728"/>
-            <a:ext cx="10515600" cy="777240"/>
+            <a:off x="384048" y="73152"/>
+            <a:ext cx="10515600" cy="768096"/>
           </a:xfrm>
           <a:prstGeom prst="rect">
             <a:avLst/>
@@ -9521,8 +9579,8 @@
         </p:nvSpPr>
         <p:spPr>
           <a:xfrm>
-            <a:off x="411480" y="6419088"/>
-            <a:ext cx="8229600" cy="365760"/>
+            <a:off x="384048" y="6400800"/>
+            <a:ext cx="8229600" cy="347472"/>
           </a:xfrm>
           <a:prstGeom prst="rect">
             <a:avLst/>
@@ -9562,8 +9620,8 @@
         </p:nvSpPr>
         <p:spPr>
           <a:xfrm>
-            <a:off x="10332720" y="6419088"/>
-            <a:ext cx="1371600" cy="365760"/>
+            <a:off x="10241280" y="6400800"/>
+            <a:ext cx="1508760" cy="347472"/>
           </a:xfrm>
           <a:prstGeom prst="rect">
             <a:avLst/>
@@ -9603,8 +9661,8 @@
         </p:nvSpPr>
         <p:spPr>
           <a:xfrm>
-            <a:off x="457200" y="1325880"/>
-            <a:ext cx="5486400" cy="3657600"/>
+            <a:off x="457200" y="1005840"/>
+            <a:ext cx="5577840" cy="3200400"/>
           </a:xfrm>
           <a:prstGeom prst="rect">
             <a:avLst/>
@@ -9625,19 +9683,19 @@
                 <a:spcPts val="400"/>
               </a:spcBef>
               <a:spcAft>
-                <a:spcPts val="400"/>
+                <a:spcPts val="300"/>
               </a:spcAft>
             </a:pPr>
             <a:r>
               <a:rPr sz="1500" b="1" i="0">
                 <a:solidFill>
-                  <a:srgbClr val="222833"/>
-                </a:solidFill>
-                <a:latin typeface="Microsoft YaHei"/>
-                <a:ea typeface="Microsoft YaHei"/>
-                <a:cs typeface="Microsoft YaHei"/>
-              </a:rPr>
-              <a:t>• 上传说明书 + 宣传文案 → 一键生成「公平说明书」</a:t>
+                  <a:srgbClr val="16213A"/>
+                </a:solidFill>
+                <a:latin typeface="Microsoft YaHei"/>
+                <a:ea typeface="Microsoft YaHei"/>
+                <a:cs typeface="Microsoft YaHei"/>
+              </a:rPr>
+              <a:t>• 一句话流程</a:t>
             </a:r>
           </a:p>
           <a:p>
@@ -9646,22 +9704,22 @@
                 <a:spcPct val="115000"/>
               </a:lnSpc>
               <a:spcBef>
-                <a:spcPts val="400"/>
+                <a:spcPts val="300"/>
               </a:spcBef>
               <a:spcAft>
-                <a:spcPts val="400"/>
+                <a:spcPts val="300"/>
               </a:spcAft>
             </a:pPr>
             <a:r>
-              <a:rPr sz="1300" b="0" i="0">
-                <a:solidFill>
-                  <a:srgbClr val="5B6372"/>
-                </a:solidFill>
-                <a:latin typeface="Microsoft YaHei"/>
-                <a:ea typeface="Microsoft YaHei"/>
-                <a:cs typeface="Microsoft YaHei"/>
-              </a:rPr>
-              <a:t>• 30 秒看懂：保本吗 / 收益多少 / 多久能取 / 收什么费</a:t>
+              <a:rPr sz="1400" b="0" i="0">
+                <a:solidFill>
+                  <a:srgbClr val="222833"/>
+                </a:solidFill>
+                <a:latin typeface="Microsoft YaHei"/>
+                <a:ea typeface="Microsoft YaHei"/>
+                <a:cs typeface="Microsoft YaHei"/>
+              </a:rPr>
+              <a:t>• 上传说明书 PDF + 粘贴宣传文案 → 一键生成「公平说明书」</a:t>
             </a:r>
           </a:p>
           <a:p>
@@ -9670,22 +9728,22 @@
                 <a:spcPct val="115000"/>
               </a:lnSpc>
               <a:spcBef>
-                <a:spcPts val="400"/>
+                <a:spcPts val="800"/>
               </a:spcBef>
               <a:spcAft>
-                <a:spcPts val="400"/>
+                <a:spcPts val="300"/>
               </a:spcAft>
             </a:pPr>
             <a:r>
-              <a:rPr sz="1300" b="0" i="0">
-                <a:solidFill>
-                  <a:srgbClr val="5B6372"/>
-                </a:solidFill>
-                <a:latin typeface="Microsoft YaHei"/>
-                <a:ea typeface="Microsoft YaHei"/>
-                <a:cs typeface="Microsoft YaHei"/>
-              </a:rPr>
-              <a:t>• 宣传材料检查：对照正式文件，揪出弱化与遗漏</a:t>
+              <a:rPr sz="1500" b="1" i="0">
+                <a:solidFill>
+                  <a:srgbClr val="16213A"/>
+                </a:solidFill>
+                <a:latin typeface="Microsoft YaHei"/>
+                <a:ea typeface="Microsoft YaHei"/>
+                <a:cs typeface="Microsoft YaHei"/>
+              </a:rPr>
+              <a:t>• 四大输出模块</a:t>
             </a:r>
           </a:p>
           <a:p>
@@ -9694,10 +9752,10 @@
                 <a:spcPct val="115000"/>
               </a:lnSpc>
               <a:spcBef>
-                <a:spcPts val="400"/>
+                <a:spcPts val="300"/>
               </a:spcBef>
               <a:spcAft>
-                <a:spcPts val="400"/>
+                <a:spcPts val="300"/>
               </a:spcAft>
             </a:pPr>
             <a:r>
@@ -9709,32 +9767,126 @@
                 <a:ea typeface="Microsoft YaHei"/>
                 <a:cs typeface="Microsoft YaHei"/>
               </a:rPr>
+              <a:t>• 30 秒看懂：保本吗 / 收益多少 / 多久能取 / 收什么费</a:t>
+            </a:r>
+          </a:p>
+          <a:p>
+            <a:pPr algn="l">
+              <a:lnSpc>
+                <a:spcPct val="115000"/>
+              </a:lnSpc>
+              <a:spcBef>
+                <a:spcPts val="300"/>
+              </a:spcBef>
+              <a:spcAft>
+                <a:spcPts val="300"/>
+              </a:spcAft>
+            </a:pPr>
+            <a:r>
+              <a:rPr sz="1300" b="0" i="0">
+                <a:solidFill>
+                  <a:srgbClr val="5B6372"/>
+                </a:solidFill>
+                <a:latin typeface="Microsoft YaHei"/>
+                <a:ea typeface="Microsoft YaHei"/>
+                <a:cs typeface="Microsoft YaHei"/>
+              </a:rPr>
+              <a:t>• 宣传材料检查：对照正式文件，揪出弱化与遗漏</a:t>
+            </a:r>
+          </a:p>
+          <a:p>
+            <a:pPr algn="l">
+              <a:lnSpc>
+                <a:spcPct val="115000"/>
+              </a:lnSpc>
+              <a:spcBef>
+                <a:spcPts val="300"/>
+              </a:spcBef>
+              <a:spcAft>
+                <a:spcPts val="300"/>
+              </a:spcAft>
+            </a:pPr>
+            <a:r>
+              <a:rPr sz="1300" b="0" i="0">
+                <a:solidFill>
+                  <a:srgbClr val="5B6372"/>
+                </a:solidFill>
+                <a:latin typeface="Microsoft YaHei"/>
+                <a:ea typeface="Microsoft YaHei"/>
+                <a:cs typeface="Microsoft YaHei"/>
+              </a:rPr>
               <a:t>• 购买前问题清单：帮你想清楚再决定</a:t>
             </a:r>
           </a:p>
-        </p:txBody>
-      </p:sp>
-      <p:sp>
-        <p:nvSpPr>
-          <p:cNvPr id="8" name="Rounded Rectangle 7"/>
+          <a:p>
+            <a:pPr algn="l">
+              <a:lnSpc>
+                <a:spcPct val="115000"/>
+              </a:lnSpc>
+              <a:spcBef>
+                <a:spcPts val="300"/>
+              </a:spcBef>
+              <a:spcAft>
+                <a:spcPts val="300"/>
+              </a:spcAft>
+            </a:pPr>
+            <a:r>
+              <a:rPr sz="1300" b="0" i="0">
+                <a:solidFill>
+                  <a:srgbClr val="5B6372"/>
+                </a:solidFill>
+                <a:latin typeface="Microsoft YaHei"/>
+                <a:ea typeface="Microsoft YaHei"/>
+                <a:cs typeface="Microsoft YaHei"/>
+              </a:rPr>
+              <a:t>• 结构化结果：Markdown / JSON / Word 可下载</a:t>
+            </a:r>
+          </a:p>
+        </p:txBody>
+      </p:sp>
+      <p:pic>
+        <p:nvPicPr>
+          <p:cNvPr id="8" name="Picture 7" descr="ui_input.png"/>
+          <p:cNvPicPr>
+            <a:picLocks noChangeAspect="1"/>
+          </p:cNvPicPr>
+          <p:nvPr/>
+        </p:nvPicPr>
+        <p:blipFill>
+          <a:blip r:embed="rId2"/>
+          <a:stretch>
+            <a:fillRect/>
+          </a:stretch>
+        </p:blipFill>
+        <p:spPr>
+          <a:xfrm>
+            <a:off x="6492240" y="1051560"/>
+            <a:ext cx="4709905236000" cy="3103158647438"/>
+          </a:xfrm>
+          <a:prstGeom prst="rect">
+            <a:avLst/>
+          </a:prstGeom>
+        </p:spPr>
+      </p:pic>
+      <p:sp>
+        <p:nvSpPr>
+          <p:cNvPr id="9" name="Rounded Rectangle 8"/>
           <p:cNvSpPr/>
           <p:nvPr/>
         </p:nvSpPr>
         <p:spPr>
           <a:xfrm>
-            <a:off x="6400800" y="1371600"/>
-            <a:ext cx="5303520" cy="4297680"/>
+            <a:off x="6492240" y="6080760"/>
+            <a:ext cx="5150815" cy="384048"/>
           </a:xfrm>
           <a:prstGeom prst="roundRect">
             <a:avLst/>
           </a:prstGeom>
           <a:solidFill>
-            <a:srgbClr val="24304E"/>
+            <a:srgbClr val="F0E4C8"/>
           </a:solidFill>
-          <a:ln w="19050">
-            <a:solidFill>
-              <a:srgbClr val="D4A037"/>
-            </a:solidFill>
+          <a:ln>
+            <a:noFill/>
           </a:ln>
           <a:effectLst/>
         </p:spPr>
@@ -9758,102 +9910,19 @@
           <a:p>
             <a:pPr algn="ctr">
               <a:lnSpc>
-                <a:spcPct val="100000"/>
-              </a:lnSpc>
-            </a:pPr>
-            <a:r>
-              <a:rPr sz="1200" b="0" i="0">
-                <a:solidFill>
-                  <a:srgbClr val="FFFFFF"/>
-                </a:solidFill>
-                <a:latin typeface="Microsoft YaHei"/>
-                <a:ea typeface="Microsoft YaHei"/>
-                <a:cs typeface="Microsoft YaHei"/>
-              </a:rPr>
-              <a:t/>
-            </a:r>
-          </a:p>
-        </p:txBody>
-      </p:sp>
-      <p:sp>
-        <p:nvSpPr>
-          <p:cNvPr id="9" name="TextBox 8"/>
-          <p:cNvSpPr txBox="1"/>
-          <p:nvPr/>
-        </p:nvSpPr>
-        <p:spPr>
-          <a:xfrm>
-            <a:off x="6400800" y="3108960"/>
-            <a:ext cx="5303520" cy="1097280"/>
-          </a:xfrm>
-          <a:prstGeom prst="rect">
-            <a:avLst/>
-          </a:prstGeom>
-          <a:noFill/>
-        </p:spPr>
-        <p:txBody>
-          <a:bodyPr wrap="square" anchor="ctr" lIns="36576" rIns="36576" tIns="18288" bIns="18288">
-            <a:spAutoFit/>
-          </a:bodyPr>
-          <a:lstStyle/>
-          <a:p>
-            <a:pPr algn="ctr">
-              <a:lnSpc>
-                <a:spcPct val="115000"/>
-              </a:lnSpc>
-            </a:pPr>
-            <a:r>
-              <a:rPr sz="1600" b="1" i="0">
-                <a:solidFill>
-                  <a:srgbClr val="D4A037"/>
-                </a:solidFill>
-                <a:latin typeface="Microsoft YaHei"/>
-                <a:ea typeface="Microsoft YaHei"/>
-                <a:cs typeface="Microsoft YaHei"/>
-              </a:rPr>
-              <a:t>［ 产品主界面截图 ］</a:t>
-            </a:r>
-          </a:p>
-          <a:p>
-            <a:pPr algn="ctr">
-              <a:lnSpc>
-                <a:spcPct val="115000"/>
-              </a:lnSpc>
-              <a:spcBef>
-                <a:spcPts val="600"/>
-              </a:spcBef>
-            </a:pPr>
-            <a:r>
-              <a:rPr sz="1200" b="0" i="0">
-                <a:solidFill>
-                  <a:srgbClr val="F4F6FA"/>
-                </a:solidFill>
-                <a:latin typeface="Microsoft YaHei"/>
-                <a:ea typeface="Microsoft YaHei"/>
-                <a:cs typeface="Microsoft YaHei"/>
-              </a:rPr>
-              <a:t>从 http://localhost:8501 截取全页</a:t>
-            </a:r>
-          </a:p>
-          <a:p>
-            <a:pPr algn="ctr">
-              <a:lnSpc>
-                <a:spcPct val="115000"/>
-              </a:lnSpc>
-              <a:spcBef>
-                <a:spcPts val="400"/>
-              </a:spcBef>
+                <a:spcPct val="105000"/>
+              </a:lnSpc>
             </a:pPr>
             <a:r>
               <a:rPr sz="1100" b="0" i="0">
                 <a:solidFill>
-                  <a:srgbClr val="5B6372"/>
-                </a:solidFill>
-                <a:latin typeface="Microsoft YaHei"/>
-                <a:ea typeface="Microsoft YaHei"/>
-                <a:cs typeface="Microsoft YaHei"/>
-              </a:rPr>
-              <a:t>标出：上传区 / 开始生成按钮 / 报告 Tab</a:t>
+                  <a:srgbClr val="222833"/>
+                </a:solidFill>
+                <a:latin typeface="Microsoft YaHei"/>
+                <a:ea typeface="Microsoft YaHei"/>
+                <a:cs typeface="Microsoft YaHei"/>
+              </a:rPr>
+              <a:t>↑ 明白金 FinFair 产品主界面（Streamlit Web App）</a:t>
             </a:r>
           </a:p>
         </p:txBody>
@@ -9872,7 +9941,7 @@
     <p:bg>
       <p:bgPr>
         <a:solidFill>
-          <a:srgbClr val="FFFFFF"/>
+          <a:srgbClr val="FAFBFC"/>
         </a:solidFill>
         <a:effectLst/>
       </p:bgPr>
@@ -9893,7 +9962,7 @@
         <p:spPr>
           <a:xfrm>
             <a:off x="0" y="0"/>
-            <a:ext cx="12191695" cy="960120"/>
+            <a:ext cx="12191695" cy="914400"/>
           </a:xfrm>
           <a:prstGeom prst="rect">
             <a:avLst/>
@@ -9926,7 +9995,7 @@
           <a:p>
             <a:pPr algn="ctr">
               <a:lnSpc>
-                <a:spcPct val="100000"/>
+                <a:spcPct val="105000"/>
               </a:lnSpc>
             </a:pPr>
             <a:r>
@@ -9952,7 +10021,7 @@
         <p:spPr>
           <a:xfrm>
             <a:off x="0" y="0"/>
-            <a:ext cx="128016" cy="960120"/>
+            <a:ext cx="109728" cy="914400"/>
           </a:xfrm>
           <a:prstGeom prst="rect">
             <a:avLst/>
@@ -9985,7 +10054,7 @@
           <a:p>
             <a:pPr algn="ctr">
               <a:lnSpc>
-                <a:spcPct val="100000"/>
+                <a:spcPct val="105000"/>
               </a:lnSpc>
             </a:pPr>
             <a:r>
@@ -10010,8 +10079,8 @@
         </p:nvSpPr>
         <p:spPr>
           <a:xfrm>
-            <a:off x="411480" y="109728"/>
-            <a:ext cx="10515600" cy="777240"/>
+            <a:off x="384048" y="73152"/>
+            <a:ext cx="10515600" cy="768096"/>
           </a:xfrm>
           <a:prstGeom prst="rect">
             <a:avLst/>
@@ -10051,8 +10120,8 @@
         </p:nvSpPr>
         <p:spPr>
           <a:xfrm>
-            <a:off x="411480" y="6419088"/>
-            <a:ext cx="8229600" cy="365760"/>
+            <a:off x="384048" y="6400800"/>
+            <a:ext cx="8229600" cy="347472"/>
           </a:xfrm>
           <a:prstGeom prst="rect">
             <a:avLst/>
@@ -10092,8 +10161,8 @@
         </p:nvSpPr>
         <p:spPr>
           <a:xfrm>
-            <a:off x="10332720" y="6419088"/>
-            <a:ext cx="1371600" cy="365760"/>
+            <a:off x="10241280" y="6400800"/>
+            <a:ext cx="1508760" cy="347472"/>
           </a:xfrm>
           <a:prstGeom prst="rect">
             <a:avLst/>
@@ -10133,8 +10202,8 @@
         </p:nvSpPr>
         <p:spPr>
           <a:xfrm>
-            <a:off x="457200" y="2148840"/>
-            <a:ext cx="1691640" cy="1143000"/>
+            <a:off x="457200" y="2331720"/>
+            <a:ext cx="1664208" cy="1078992"/>
           </a:xfrm>
           <a:prstGeom prst="roundRect">
             <a:avLst/>
@@ -10167,7 +10236,7 @@
           <a:p>
             <a:pPr algn="ctr">
               <a:lnSpc>
-                <a:spcPct val="100000"/>
+                <a:spcPct val="105000"/>
               </a:lnSpc>
             </a:pPr>
             <a:r>
@@ -10192,8 +10261,8 @@
         </p:nvSpPr>
         <p:spPr>
           <a:xfrm>
-            <a:off x="457200" y="3291840"/>
-            <a:ext cx="1691640" cy="365760"/>
+            <a:off x="457200" y="3410711"/>
+            <a:ext cx="1664208" cy="329184"/>
           </a:xfrm>
           <a:prstGeom prst="rect">
             <a:avLst/>
@@ -10226,7 +10295,7 @@
           <a:p>
             <a:pPr algn="ctr">
               <a:lnSpc>
-                <a:spcPct val="100000"/>
+                <a:spcPct val="105000"/>
               </a:lnSpc>
             </a:pPr>
             <a:r>
@@ -10251,8 +10320,8 @@
         </p:nvSpPr>
         <p:spPr>
           <a:xfrm>
-            <a:off x="2148840" y="2519172"/>
-            <a:ext cx="292608" cy="402336"/>
+            <a:off x="2121408" y="2706623"/>
+            <a:ext cx="237744" cy="329184"/>
           </a:xfrm>
           <a:prstGeom prst="rightArrow">
             <a:avLst/>
@@ -10295,8 +10364,8 @@
         </p:nvSpPr>
         <p:spPr>
           <a:xfrm>
-            <a:off x="2441448" y="2148840"/>
-            <a:ext cx="1691640" cy="1143000"/>
+            <a:off x="2359152" y="2331720"/>
+            <a:ext cx="1664208" cy="1078992"/>
           </a:xfrm>
           <a:prstGeom prst="roundRect">
             <a:avLst/>
@@ -10329,7 +10398,7 @@
           <a:p>
             <a:pPr algn="ctr">
               <a:lnSpc>
-                <a:spcPct val="100000"/>
+                <a:spcPct val="105000"/>
               </a:lnSpc>
             </a:pPr>
             <a:r>
@@ -10354,8 +10423,8 @@
         </p:nvSpPr>
         <p:spPr>
           <a:xfrm>
-            <a:off x="2441448" y="3291840"/>
-            <a:ext cx="1691640" cy="365760"/>
+            <a:off x="2359152" y="3410711"/>
+            <a:ext cx="1664208" cy="329184"/>
           </a:xfrm>
           <a:prstGeom prst="rect">
             <a:avLst/>
@@ -10388,7 +10457,7 @@
           <a:p>
             <a:pPr algn="ctr">
               <a:lnSpc>
-                <a:spcPct val="100000"/>
+                <a:spcPct val="105000"/>
               </a:lnSpc>
             </a:pPr>
             <a:r>
@@ -10413,8 +10482,8 @@
         </p:nvSpPr>
         <p:spPr>
           <a:xfrm>
-            <a:off x="4133087" y="2519172"/>
-            <a:ext cx="292608" cy="402336"/>
+            <a:off x="4023360" y="2706623"/>
+            <a:ext cx="237744" cy="329184"/>
           </a:xfrm>
           <a:prstGeom prst="rightArrow">
             <a:avLst/>
@@ -10457,8 +10526,8 @@
         </p:nvSpPr>
         <p:spPr>
           <a:xfrm>
-            <a:off x="4425696" y="2148840"/>
-            <a:ext cx="1691640" cy="1143000"/>
+            <a:off x="4261104" y="2331720"/>
+            <a:ext cx="1664208" cy="1078992"/>
           </a:xfrm>
           <a:prstGeom prst="roundRect">
             <a:avLst/>
@@ -10491,7 +10560,7 @@
           <a:p>
             <a:pPr algn="ctr">
               <a:lnSpc>
-                <a:spcPct val="100000"/>
+                <a:spcPct val="105000"/>
               </a:lnSpc>
             </a:pPr>
             <a:r>
@@ -10516,8 +10585,8 @@
         </p:nvSpPr>
         <p:spPr>
           <a:xfrm>
-            <a:off x="4425696" y="3291840"/>
-            <a:ext cx="1691640" cy="365760"/>
+            <a:off x="4261104" y="3410711"/>
+            <a:ext cx="1664208" cy="329184"/>
           </a:xfrm>
           <a:prstGeom prst="rect">
             <a:avLst/>
@@ -10550,7 +10619,7 @@
           <a:p>
             <a:pPr algn="ctr">
               <a:lnSpc>
-                <a:spcPct val="100000"/>
+                <a:spcPct val="105000"/>
               </a:lnSpc>
             </a:pPr>
             <a:r>
@@ -10575,8 +10644,8 @@
         </p:nvSpPr>
         <p:spPr>
           <a:xfrm>
-            <a:off x="6117336" y="2519172"/>
-            <a:ext cx="292608" cy="402336"/>
+            <a:off x="5925312" y="2706623"/>
+            <a:ext cx="237744" cy="329184"/>
           </a:xfrm>
           <a:prstGeom prst="rightArrow">
             <a:avLst/>
@@ -10619,8 +10688,8 @@
         </p:nvSpPr>
         <p:spPr>
           <a:xfrm>
-            <a:off x="6409944" y="2148840"/>
-            <a:ext cx="1691640" cy="1143000"/>
+            <a:off x="6163056" y="2331720"/>
+            <a:ext cx="1664208" cy="1078992"/>
           </a:xfrm>
           <a:prstGeom prst="roundRect">
             <a:avLst/>
@@ -10653,7 +10722,7 @@
           <a:p>
             <a:pPr algn="ctr">
               <a:lnSpc>
-                <a:spcPct val="100000"/>
+                <a:spcPct val="105000"/>
               </a:lnSpc>
             </a:pPr>
             <a:r>
@@ -10678,8 +10747,8 @@
         </p:nvSpPr>
         <p:spPr>
           <a:xfrm>
-            <a:off x="6409944" y="3291840"/>
-            <a:ext cx="1691640" cy="365760"/>
+            <a:off x="6163056" y="3410711"/>
+            <a:ext cx="1664208" cy="329184"/>
           </a:xfrm>
           <a:prstGeom prst="rect">
             <a:avLst/>
@@ -10712,7 +10781,7 @@
           <a:p>
             <a:pPr algn="ctr">
               <a:lnSpc>
-                <a:spcPct val="100000"/>
+                <a:spcPct val="105000"/>
               </a:lnSpc>
             </a:pPr>
             <a:r>
@@ -10737,8 +10806,8 @@
         </p:nvSpPr>
         <p:spPr>
           <a:xfrm>
-            <a:off x="8101583" y="2519172"/>
-            <a:ext cx="292608" cy="402336"/>
+            <a:off x="7827264" y="2706623"/>
+            <a:ext cx="237744" cy="329184"/>
           </a:xfrm>
           <a:prstGeom prst="rightArrow">
             <a:avLst/>
@@ -10781,8 +10850,8 @@
         </p:nvSpPr>
         <p:spPr>
           <a:xfrm>
-            <a:off x="8394192" y="2148840"/>
-            <a:ext cx="1691640" cy="1143000"/>
+            <a:off x="8065008" y="2331720"/>
+            <a:ext cx="1664208" cy="1078992"/>
           </a:xfrm>
           <a:prstGeom prst="roundRect">
             <a:avLst/>
@@ -10815,7 +10884,7 @@
           <a:p>
             <a:pPr algn="ctr">
               <a:lnSpc>
-                <a:spcPct val="100000"/>
+                <a:spcPct val="105000"/>
               </a:lnSpc>
             </a:pPr>
             <a:r>
@@ -10840,8 +10909,8 @@
         </p:nvSpPr>
         <p:spPr>
           <a:xfrm>
-            <a:off x="8394192" y="3291840"/>
-            <a:ext cx="1691640" cy="365760"/>
+            <a:off x="8065008" y="3410711"/>
+            <a:ext cx="1664208" cy="329184"/>
           </a:xfrm>
           <a:prstGeom prst="rect">
             <a:avLst/>
@@ -10874,7 +10943,7 @@
           <a:p>
             <a:pPr algn="ctr">
               <a:lnSpc>
-                <a:spcPct val="100000"/>
+                <a:spcPct val="105000"/>
               </a:lnSpc>
             </a:pPr>
             <a:r>
@@ -10899,8 +10968,8 @@
         </p:nvSpPr>
         <p:spPr>
           <a:xfrm>
-            <a:off x="10085832" y="2519172"/>
-            <a:ext cx="292608" cy="402336"/>
+            <a:off x="9729216" y="2706623"/>
+            <a:ext cx="237744" cy="329184"/>
           </a:xfrm>
           <a:prstGeom prst="rightArrow">
             <a:avLst/>
@@ -10943,8 +11012,8 @@
         </p:nvSpPr>
         <p:spPr>
           <a:xfrm>
-            <a:off x="10378440" y="2148840"/>
-            <a:ext cx="1691640" cy="1143000"/>
+            <a:off x="9966960" y="2331720"/>
+            <a:ext cx="1664208" cy="1078992"/>
           </a:xfrm>
           <a:prstGeom prst="roundRect">
             <a:avLst/>
@@ -10977,7 +11046,7 @@
           <a:p>
             <a:pPr algn="ctr">
               <a:lnSpc>
-                <a:spcPct val="100000"/>
+                <a:spcPct val="105000"/>
               </a:lnSpc>
             </a:pPr>
             <a:r>
@@ -11002,8 +11071,8 @@
         </p:nvSpPr>
         <p:spPr>
           <a:xfrm>
-            <a:off x="10378440" y="3291840"/>
-            <a:ext cx="1691640" cy="365760"/>
+            <a:off x="9966960" y="3410711"/>
+            <a:ext cx="1664208" cy="329184"/>
           </a:xfrm>
           <a:prstGeom prst="rect">
             <a:avLst/>
@@ -11036,7 +11105,7 @@
           <a:p>
             <a:pPr algn="ctr">
               <a:lnSpc>
-                <a:spcPct val="100000"/>
+                <a:spcPct val="105000"/>
               </a:lnSpc>
             </a:pPr>
             <a:r>
@@ -11061,8 +11130,8 @@
         </p:nvSpPr>
         <p:spPr>
           <a:xfrm>
-            <a:off x="457200" y="4023360"/>
-            <a:ext cx="11247120" cy="914400"/>
+            <a:off x="457200" y="3794760"/>
+            <a:ext cx="11277295" cy="685800"/>
           </a:xfrm>
           <a:prstGeom prst="rect">
             <a:avLst/>
@@ -11081,7 +11150,7 @@
               </a:lnSpc>
             </a:pPr>
             <a:r>
-              <a:rPr sz="1500" b="1" i="0">
+              <a:rPr sz="1600" b="1" i="0">
                 <a:solidFill>
                   <a:srgbClr val="16213A"/>
                 </a:solidFill>
@@ -11102,8 +11171,8 @@
         </p:nvSpPr>
         <p:spPr>
           <a:xfrm>
-            <a:off x="457200" y="4846320"/>
-            <a:ext cx="11247120" cy="1097280"/>
+            <a:off x="457200" y="4526280"/>
+            <a:ext cx="11277295" cy="914400"/>
           </a:xfrm>
           <a:prstGeom prst="rect">
             <a:avLst/>
@@ -11118,7 +11187,7 @@
           <a:p>
             <a:pPr algn="ctr">
               <a:lnSpc>
-                <a:spcPct val="120000"/>
+                <a:spcPct val="125000"/>
               </a:lnSpc>
             </a:pPr>
             <a:r>
@@ -11130,7 +11199,7 @@
                 <a:ea typeface="Microsoft YaHei"/>
                 <a:cs typeface="Microsoft YaHei"/>
               </a:rPr>
-              <a:t>解析 = 读 PDF 文字   提取 = 定位保本/收益/锁定期/费用   检查 = 对照宣传找差异   核验 = 结论回链原文</a:t>
+              <a:t>解析 = 读 PDF 文字   提取 = 定位保本/收益/锁定期/费用   检查 = 对照宣传找差异   核验 = 结论回链原文页码</a:t>
             </a:r>
           </a:p>
         </p:txBody>
@@ -11149,7 +11218,7 @@
     <p:bg>
       <p:bgPr>
         <a:solidFill>
-          <a:srgbClr val="FFFFFF"/>
+          <a:srgbClr val="FAFBFC"/>
         </a:solidFill>
         <a:effectLst/>
       </p:bgPr>
@@ -11170,7 +11239,7 @@
         <p:spPr>
           <a:xfrm>
             <a:off x="0" y="0"/>
-            <a:ext cx="12191695" cy="960120"/>
+            <a:ext cx="12191695" cy="914400"/>
           </a:xfrm>
           <a:prstGeom prst="rect">
             <a:avLst/>
@@ -11203,7 +11272,7 @@
           <a:p>
             <a:pPr algn="ctr">
               <a:lnSpc>
-                <a:spcPct val="100000"/>
+                <a:spcPct val="105000"/>
               </a:lnSpc>
             </a:pPr>
             <a:r>
@@ -11229,7 +11298,7 @@
         <p:spPr>
           <a:xfrm>
             <a:off x="0" y="0"/>
-            <a:ext cx="128016" cy="960120"/>
+            <a:ext cx="109728" cy="914400"/>
           </a:xfrm>
           <a:prstGeom prst="rect">
             <a:avLst/>
@@ -11262,7 +11331,7 @@
           <a:p>
             <a:pPr algn="ctr">
               <a:lnSpc>
-                <a:spcPct val="100000"/>
+                <a:spcPct val="105000"/>
               </a:lnSpc>
             </a:pPr>
             <a:r>
@@ -11287,8 +11356,8 @@
         </p:nvSpPr>
         <p:spPr>
           <a:xfrm>
-            <a:off x="411480" y="109728"/>
-            <a:ext cx="10515600" cy="777240"/>
+            <a:off x="384048" y="73152"/>
+            <a:ext cx="10515600" cy="768096"/>
           </a:xfrm>
           <a:prstGeom prst="rect">
             <a:avLst/>
@@ -11328,8 +11397,8 @@
         </p:nvSpPr>
         <p:spPr>
           <a:xfrm>
-            <a:off x="411480" y="6419088"/>
-            <a:ext cx="8229600" cy="365760"/>
+            <a:off x="384048" y="6400800"/>
+            <a:ext cx="8229600" cy="347472"/>
           </a:xfrm>
           <a:prstGeom prst="rect">
             <a:avLst/>
@@ -11369,8 +11438,8 @@
         </p:nvSpPr>
         <p:spPr>
           <a:xfrm>
-            <a:off x="10332720" y="6419088"/>
-            <a:ext cx="1371600" cy="365760"/>
+            <a:off x="10241280" y="6400800"/>
+            <a:ext cx="1508760" cy="347472"/>
           </a:xfrm>
           <a:prstGeom prst="rect">
             <a:avLst/>
@@ -11410,8 +11479,8 @@
         </p:nvSpPr>
         <p:spPr>
           <a:xfrm>
-            <a:off x="457200" y="1371600"/>
-            <a:ext cx="5394960" cy="960120"/>
+            <a:off x="457200" y="1005840"/>
+            <a:ext cx="5577840" cy="914400"/>
           </a:xfrm>
           <a:prstGeom prst="roundRect">
             <a:avLst/>
@@ -11444,11 +11513,11 @@
           <a:p>
             <a:pPr algn="ctr">
               <a:lnSpc>
-                <a:spcPct val="100000"/>
-              </a:lnSpc>
-            </a:pPr>
-            <a:r>
-              <a:rPr sz="1300" b="1" i="0">
+                <a:spcPct val="105000"/>
+              </a:lnSpc>
+            </a:pPr>
+            <a:r>
+              <a:rPr sz="1400" b="1" i="0">
                 <a:solidFill>
                   <a:srgbClr val="FFFFFF"/>
                 </a:solidFill>
@@ -11469,8 +11538,8 @@
         </p:nvSpPr>
         <p:spPr>
           <a:xfrm>
-            <a:off x="457200" y="2514600"/>
-            <a:ext cx="5394960" cy="1371600"/>
+            <a:off x="457200" y="2057400"/>
+            <a:ext cx="5577840" cy="1417320"/>
           </a:xfrm>
           <a:prstGeom prst="roundRect">
             <a:avLst/>
@@ -11503,11 +11572,11 @@
           <a:p>
             <a:pPr algn="ctr">
               <a:lnSpc>
-                <a:spcPct val="100000"/>
-              </a:lnSpc>
-            </a:pPr>
-            <a:r>
-              <a:rPr sz="1300" b="1" i="0">
+                <a:spcPct val="105000"/>
+              </a:lnSpc>
+            </a:pPr>
+            <a:r>
+              <a:rPr sz="1400" b="1" i="0">
                 <a:solidFill>
                   <a:srgbClr val="FFFFFF"/>
                 </a:solidFill>
@@ -11521,11 +11590,11 @@
           <a:p>
             <a:pPr algn="ctr">
               <a:lnSpc>
-                <a:spcPct val="100000"/>
-              </a:lnSpc>
-            </a:pPr>
-            <a:r>
-              <a:rPr sz="1300" b="1" i="0">
+                <a:spcPct val="105000"/>
+              </a:lnSpc>
+            </a:pPr>
+            <a:r>
+              <a:rPr sz="1400" b="1" i="0">
                 <a:solidFill>
                   <a:srgbClr val="FFFFFF"/>
                 </a:solidFill>
@@ -11546,8 +11615,8 @@
         </p:nvSpPr>
         <p:spPr>
           <a:xfrm>
-            <a:off x="457200" y="4069080"/>
-            <a:ext cx="5394960" cy="868680"/>
+            <a:off x="457200" y="3611880"/>
+            <a:ext cx="5577840" cy="841248"/>
           </a:xfrm>
           <a:prstGeom prst="roundRect">
             <a:avLst/>
@@ -11580,11 +11649,11 @@
           <a:p>
             <a:pPr algn="ctr">
               <a:lnSpc>
-                <a:spcPct val="100000"/>
-              </a:lnSpc>
-            </a:pPr>
-            <a:r>
-              <a:rPr sz="1300" b="1" i="0">
+                <a:spcPct val="105000"/>
+              </a:lnSpc>
+            </a:pPr>
+            <a:r>
+              <a:rPr sz="1400" b="1" i="0">
                 <a:solidFill>
                   <a:srgbClr val="FFFFFF"/>
                 </a:solidFill>
@@ -11605,8 +11674,8 @@
         </p:nvSpPr>
         <p:spPr>
           <a:xfrm>
-            <a:off x="548640" y="5120640"/>
-            <a:ext cx="5394960" cy="1097280"/>
+            <a:off x="548640" y="3657600"/>
+            <a:ext cx="5394959" cy="1097280"/>
           </a:xfrm>
           <a:prstGeom prst="rect">
             <a:avLst/>
@@ -11625,7 +11694,7 @@
               </a:lnSpc>
             </a:pPr>
             <a:r>
-              <a:rPr sz="1300" b="1" i="0">
+              <a:rPr sz="1400" b="1" i="0">
                 <a:solidFill>
                   <a:srgbClr val="D4A037"/>
                 </a:solidFill>
@@ -11651,7 +11720,43 @@
                 <a:ea typeface="Microsoft YaHei"/>
                 <a:cs typeface="Microsoft YaHei"/>
               </a:rPr>
-              <a:t>① 证据核验 Agent   ② 程序化逐字引用校验   ③ 找不到标「未找到」</a:t>
+              <a:t>① 证据核验 Agent 审查大模型输出</a:t>
+            </a:r>
+          </a:p>
+          <a:p>
+            <a:pPr algn="l">
+              <a:lnSpc>
+                <a:spcPct val="120000"/>
+              </a:lnSpc>
+            </a:pPr>
+            <a:r>
+              <a:rPr sz="1100" b="0" i="0">
+                <a:solidFill>
+                  <a:srgbClr val="5B6372"/>
+                </a:solidFill>
+                <a:latin typeface="Microsoft YaHei"/>
+                <a:ea typeface="Microsoft YaHei"/>
+                <a:cs typeface="Microsoft YaHei"/>
+              </a:rPr>
+              <a:t>② 程序化逐字引用校验（机器自动比对）</a:t>
+            </a:r>
+          </a:p>
+          <a:p>
+            <a:pPr algn="l">
+              <a:lnSpc>
+                <a:spcPct val="120000"/>
+              </a:lnSpc>
+            </a:pPr>
+            <a:r>
+              <a:rPr sz="1100" b="0" i="0">
+                <a:solidFill>
+                  <a:srgbClr val="5B6372"/>
+                </a:solidFill>
+                <a:latin typeface="Microsoft YaHei"/>
+                <a:ea typeface="Microsoft YaHei"/>
+                <a:cs typeface="Microsoft YaHei"/>
+              </a:rPr>
+              <a:t>③ 找不到就标「未找到」，绝不拿常识补全</a:t>
             </a:r>
           </a:p>
         </p:txBody>
@@ -11664,8 +11769,8 @@
         </p:nvSpPr>
         <p:spPr>
           <a:xfrm>
-            <a:off x="6400800" y="1371600"/>
-            <a:ext cx="5303520" cy="365760"/>
+            <a:off x="6400800" y="1005840"/>
+            <a:ext cx="5333695" cy="347472"/>
           </a:xfrm>
           <a:prstGeom prst="rect">
             <a:avLst/>
@@ -11698,11 +11803,11 @@
           <a:p>
             <a:pPr algn="ctr">
               <a:lnSpc>
-                <a:spcPct val="100000"/>
-              </a:lnSpc>
-            </a:pPr>
-            <a:r>
-              <a:rPr sz="1100" b="1" i="0">
+                <a:spcPct val="105000"/>
+              </a:lnSpc>
+            </a:pPr>
+            <a:r>
+              <a:rPr sz="1200" b="1" i="0">
                 <a:solidFill>
                   <a:srgbClr val="16213A"/>
                 </a:solidFill>
@@ -11710,7 +11815,7 @@
                 <a:ea typeface="Microsoft YaHei"/>
                 <a:cs typeface="Microsoft YaHei"/>
               </a:rPr>
-              <a:t>llm_agent.py · _endpoint（接口安全校验）</a:t>
+              <a:t>llm_agent.py :: _endpoint（接口安全校验）</a:t>
             </a:r>
           </a:p>
         </p:txBody>
@@ -11723,8 +11828,8 @@
         </p:nvSpPr>
         <p:spPr>
           <a:xfrm>
-            <a:off x="6400800" y="1737360"/>
-            <a:ext cx="5303520" cy="2377440"/>
+            <a:off x="6400800" y="1353312"/>
+            <a:ext cx="5333695" cy="2331720"/>
           </a:xfrm>
           <a:prstGeom prst="rect">
             <a:avLst/>
@@ -11757,7 +11862,7 @@
           <a:p>
             <a:pPr algn="ctr">
               <a:lnSpc>
-                <a:spcPct val="100000"/>
+                <a:spcPct val="105000"/>
               </a:lnSpc>
             </a:pPr>
             <a:r>
@@ -11782,8 +11887,8 @@
         </p:nvSpPr>
         <p:spPr>
           <a:xfrm>
-            <a:off x="6537960" y="1828800"/>
-            <a:ext cx="5029200" cy="2194560"/>
+            <a:off x="6510528" y="1444752"/>
+            <a:ext cx="5114239" cy="2148840"/>
           </a:xfrm>
           <a:prstGeom prst="rect">
             <a:avLst/>
@@ -12021,8 +12126,8 @@
         </p:nvSpPr>
         <p:spPr>
           <a:xfrm>
-            <a:off x="6400800" y="4114800"/>
-            <a:ext cx="5303520" cy="1371600"/>
+            <a:off x="6400800" y="3794760"/>
+            <a:ext cx="5333695" cy="1234440"/>
           </a:xfrm>
           <a:prstGeom prst="roundRect">
             <a:avLst/>
@@ -12057,7 +12162,7 @@
           <a:p>
             <a:pPr algn="ctr">
               <a:lnSpc>
-                <a:spcPct val="100000"/>
+                <a:spcPct val="105000"/>
               </a:lnSpc>
             </a:pPr>
             <a:r>
@@ -12069,13 +12174,13 @@
                 <a:ea typeface="Microsoft YaHei"/>
                 <a:cs typeface="Microsoft YaHei"/>
               </a:rPr>
-              <a:t>② 逐字引用校验：机器自动比对</a:t>
+              <a:t>② 逐字引用校验</a:t>
             </a:r>
           </a:p>
           <a:p>
             <a:pPr algn="ctr">
               <a:lnSpc>
-                <a:spcPct val="100000"/>
+                <a:spcPct val="105000"/>
               </a:lnSpc>
             </a:pPr>
             <a:r>
@@ -12087,13 +12192,13 @@
                 <a:ea typeface="Microsoft YaHei"/>
                 <a:cs typeface="Microsoft YaHei"/>
               </a:rPr>
-              <a:t>「结论」与「原文」是否一致</a:t>
+              <a:t>机器自动比对「结论」与「原文」是否一致</a:t>
             </a:r>
           </a:p>
           <a:p>
             <a:pPr algn="ctr">
               <a:lnSpc>
-                <a:spcPct val="100000"/>
+                <a:spcPct val="105000"/>
               </a:lnSpc>
             </a:pPr>
             <a:r>
@@ -12124,7 +12229,7 @@
     <p:bg>
       <p:bgPr>
         <a:solidFill>
-          <a:srgbClr val="FFFFFF"/>
+          <a:srgbClr val="FAFBFC"/>
         </a:solidFill>
         <a:effectLst/>
       </p:bgPr>
@@ -12145,7 +12250,7 @@
         <p:spPr>
           <a:xfrm>
             <a:off x="0" y="0"/>
-            <a:ext cx="12191695" cy="960120"/>
+            <a:ext cx="12191695" cy="914400"/>
           </a:xfrm>
           <a:prstGeom prst="rect">
             <a:avLst/>
@@ -12178,7 +12283,7 @@
           <a:p>
             <a:pPr algn="ctr">
               <a:lnSpc>
-                <a:spcPct val="100000"/>
+                <a:spcPct val="105000"/>
               </a:lnSpc>
             </a:pPr>
             <a:r>
@@ -12204,7 +12309,7 @@
         <p:spPr>
           <a:xfrm>
             <a:off x="0" y="0"/>
-            <a:ext cx="128016" cy="960120"/>
+            <a:ext cx="109728" cy="914400"/>
           </a:xfrm>
           <a:prstGeom prst="rect">
             <a:avLst/>
@@ -12237,7 +12342,7 @@
           <a:p>
             <a:pPr algn="ctr">
               <a:lnSpc>
-                <a:spcPct val="100000"/>
+                <a:spcPct val="105000"/>
               </a:lnSpc>
             </a:pPr>
             <a:r>
@@ -12262,8 +12367,8 @@
         </p:nvSpPr>
         <p:spPr>
           <a:xfrm>
-            <a:off x="411480" y="109728"/>
-            <a:ext cx="10515600" cy="777240"/>
+            <a:off x="384048" y="73152"/>
+            <a:ext cx="10515600" cy="768096"/>
           </a:xfrm>
           <a:prstGeom prst="rect">
             <a:avLst/>
@@ -12303,8 +12408,8 @@
         </p:nvSpPr>
         <p:spPr>
           <a:xfrm>
-            <a:off x="411480" y="6419088"/>
-            <a:ext cx="8229600" cy="365760"/>
+            <a:off x="384048" y="6400800"/>
+            <a:ext cx="8229600" cy="347472"/>
           </a:xfrm>
           <a:prstGeom prst="rect">
             <a:avLst/>
@@ -12344,8 +12449,8 @@
         </p:nvSpPr>
         <p:spPr>
           <a:xfrm>
-            <a:off x="10332720" y="6419088"/>
-            <a:ext cx="1371600" cy="365760"/>
+            <a:off x="10241280" y="6400800"/>
+            <a:ext cx="1508760" cy="347472"/>
           </a:xfrm>
           <a:prstGeom prst="rect">
             <a:avLst/>
@@ -12385,8 +12490,8 @@
         </p:nvSpPr>
         <p:spPr>
           <a:xfrm>
-            <a:off x="457200" y="1417320"/>
-            <a:ext cx="5486400" cy="2194560"/>
+            <a:off x="457200" y="1005840"/>
+            <a:ext cx="5440680" cy="2148840"/>
           </a:xfrm>
           <a:prstGeom prst="roundRect">
             <a:avLst/>
@@ -12394,7 +12499,7 @@
           <a:solidFill>
             <a:srgbClr val="24304E"/>
           </a:solidFill>
-          <a:ln w="15240">
+          <a:ln w="16510">
             <a:solidFill>
               <a:srgbClr val="D4A037"/>
             </a:solidFill>
@@ -12421,7 +12526,7 @@
           <a:p>
             <a:pPr algn="ctr">
               <a:lnSpc>
-                <a:spcPct val="100000"/>
+                <a:spcPct val="105000"/>
               </a:lnSpc>
             </a:pPr>
             <a:r>
@@ -12440,14 +12545,73 @@
       </p:sp>
       <p:sp>
         <p:nvSpPr>
-          <p:cNvPr id="8" name="TextBox 7"/>
+          <p:cNvPr id="8" name="Oval 7"/>
+          <p:cNvSpPr/>
+          <p:nvPr/>
+        </p:nvSpPr>
+        <p:spPr>
+          <a:xfrm>
+            <a:off x="621792" y="1207008"/>
+            <a:ext cx="566928" cy="566928"/>
+          </a:xfrm>
+          <a:prstGeom prst="ellipse">
+            <a:avLst/>
+          </a:prstGeom>
+          <a:solidFill>
+            <a:srgbClr val="D4A037"/>
+          </a:solidFill>
+          <a:ln>
+            <a:noFill/>
+          </a:ln>
+          <a:effectLst/>
+        </p:spPr>
+        <p:style>
+          <a:lnRef idx="1">
+            <a:schemeClr val="accent1"/>
+          </a:lnRef>
+          <a:fillRef idx="3">
+            <a:schemeClr val="accent1"/>
+          </a:fillRef>
+          <a:effectRef idx="2">
+            <a:schemeClr val="accent1"/>
+          </a:effectRef>
+          <a:fontRef idx="minor">
+            <a:schemeClr val="lt1"/>
+          </a:fontRef>
+        </p:style>
+        <p:txBody>
+          <a:bodyPr rtlCol="0" anchor="ctr" wrap="square" lIns="54864" rIns="54864" tIns="27432" bIns="27432"/>
+          <a:lstStyle/>
+          <a:p>
+            <a:pPr algn="ctr">
+              <a:lnSpc>
+                <a:spcPct val="105000"/>
+              </a:lnSpc>
+            </a:pPr>
+            <a:r>
+              <a:rPr sz="2000" b="1" i="0">
+                <a:solidFill>
+                  <a:srgbClr val="16213A"/>
+                </a:solidFill>
+                <a:latin typeface="Microsoft YaHei"/>
+                <a:ea typeface="Microsoft YaHei"/>
+                <a:cs typeface="Microsoft YaHei"/>
+              </a:rPr>
+              <a:t>1</a:t>
+            </a:r>
+          </a:p>
+        </p:txBody>
+      </p:sp>
+      <p:sp>
+        <p:nvSpPr>
+          <p:cNvPr id="9" name="TextBox 8"/>
           <p:cNvSpPr txBox="1"/>
           <p:nvPr/>
         </p:nvSpPr>
         <p:spPr>
           <a:xfrm>
-            <a:off x="685800" y="1600200"/>
-            <a:ext cx="1097280" cy="914400"/>
+            <a:off x="1325880" y="1207008"/>
+            <a:ext cx="4389120" cy="1746504"/>
           </a:xfrm>
           <a:prstGeom prst="rect">
             <a:avLst/>
@@ -12460,54 +12624,13 @@
           </a:bodyPr>
           <a:lstStyle/>
           <a:p>
-            <a:pPr algn="ctr">
+            <a:pPr algn="l">
               <a:lnSpc>
                 <a:spcPct val="115000"/>
               </a:lnSpc>
             </a:pPr>
             <a:r>
-              <a:rPr sz="3400" b="0" i="0">
-                <a:solidFill>
-                  <a:srgbClr val="222833"/>
-                </a:solidFill>
-                <a:latin typeface="Microsoft YaHei"/>
-                <a:ea typeface="Microsoft YaHei"/>
-                <a:cs typeface="Microsoft YaHei"/>
-              </a:rPr>
-              <a:t>⚖️</a:t>
-            </a:r>
-          </a:p>
-        </p:txBody>
-      </p:sp>
-      <p:sp>
-        <p:nvSpPr>
-          <p:cNvPr id="9" name="TextBox 8"/>
-          <p:cNvSpPr txBox="1"/>
-          <p:nvPr/>
-        </p:nvSpPr>
-        <p:spPr>
-          <a:xfrm>
-            <a:off x="1828800" y="1645920"/>
-            <a:ext cx="3931920" cy="1737360"/>
-          </a:xfrm>
-          <a:prstGeom prst="rect">
-            <a:avLst/>
-          </a:prstGeom>
-          <a:noFill/>
-        </p:spPr>
-        <p:txBody>
-          <a:bodyPr wrap="square" anchor="ctr" lIns="36576" rIns="36576" tIns="18288" bIns="18288">
-            <a:spAutoFit/>
-          </a:bodyPr>
-          <a:lstStyle/>
-          <a:p>
-            <a:pPr algn="l">
-              <a:lnSpc>
-                <a:spcPct val="115000"/>
-              </a:lnSpc>
-            </a:pPr>
-            <a:r>
-              <a:rPr sz="1800" b="1" i="0">
+              <a:rPr sz="1700" b="1" i="0">
                 <a:solidFill>
                   <a:srgbClr val="D4A037"/>
                 </a:solidFill>
@@ -12528,7 +12651,7 @@
               </a:spcBef>
             </a:pPr>
             <a:r>
-              <a:rPr sz="1300" b="0" i="0">
+              <a:rPr sz="1200" b="0" i="0">
                 <a:solidFill>
                   <a:srgbClr val="F4F6FA"/>
                 </a:solidFill>
@@ -12536,7 +12659,8 @@
                 <a:ea typeface="Microsoft YaHei"/>
                 <a:cs typeface="Microsoft YaHei"/>
               </a:rPr>
-              <a:t>不做产品推荐，只做信息公平，避开持牌红线</a:t>
+              <a:t>不做产品推荐，只做信息公平
+避开金融持牌红线</a:t>
             </a:r>
           </a:p>
         </p:txBody>
@@ -12549,8 +12673,8 @@
         </p:nvSpPr>
         <p:spPr>
           <a:xfrm>
-            <a:off x="6245352" y="1417320"/>
-            <a:ext cx="5486400" cy="2194560"/>
+            <a:off x="6217920" y="1005840"/>
+            <a:ext cx="5440680" cy="2148840"/>
           </a:xfrm>
           <a:prstGeom prst="roundRect">
             <a:avLst/>
@@ -12558,7 +12682,7 @@
           <a:solidFill>
             <a:srgbClr val="24304E"/>
           </a:solidFill>
-          <a:ln w="15240">
+          <a:ln w="16510">
             <a:solidFill>
               <a:srgbClr val="D4A037"/>
             </a:solidFill>
@@ -12585,7 +12709,7 @@
           <a:p>
             <a:pPr algn="ctr">
               <a:lnSpc>
-                <a:spcPct val="100000"/>
+                <a:spcPct val="105000"/>
               </a:lnSpc>
             </a:pPr>
             <a:r>
@@ -12604,14 +12728,73 @@
       </p:sp>
       <p:sp>
         <p:nvSpPr>
-          <p:cNvPr id="11" name="TextBox 10"/>
+          <p:cNvPr id="11" name="Oval 10"/>
+          <p:cNvSpPr/>
+          <p:nvPr/>
+        </p:nvSpPr>
+        <p:spPr>
+          <a:xfrm>
+            <a:off x="6382512" y="1207008"/>
+            <a:ext cx="566928" cy="566928"/>
+          </a:xfrm>
+          <a:prstGeom prst="ellipse">
+            <a:avLst/>
+          </a:prstGeom>
+          <a:solidFill>
+            <a:srgbClr val="D4A037"/>
+          </a:solidFill>
+          <a:ln>
+            <a:noFill/>
+          </a:ln>
+          <a:effectLst/>
+        </p:spPr>
+        <p:style>
+          <a:lnRef idx="1">
+            <a:schemeClr val="accent1"/>
+          </a:lnRef>
+          <a:fillRef idx="3">
+            <a:schemeClr val="accent1"/>
+          </a:fillRef>
+          <a:effectRef idx="2">
+            <a:schemeClr val="accent1"/>
+          </a:effectRef>
+          <a:fontRef idx="minor">
+            <a:schemeClr val="lt1"/>
+          </a:fontRef>
+        </p:style>
+        <p:txBody>
+          <a:bodyPr rtlCol="0" anchor="ctr" wrap="square" lIns="54864" rIns="54864" tIns="27432" bIns="27432"/>
+          <a:lstStyle/>
+          <a:p>
+            <a:pPr algn="ctr">
+              <a:lnSpc>
+                <a:spcPct val="105000"/>
+              </a:lnSpc>
+            </a:pPr>
+            <a:r>
+              <a:rPr sz="2000" b="1" i="0">
+                <a:solidFill>
+                  <a:srgbClr val="16213A"/>
+                </a:solidFill>
+                <a:latin typeface="Microsoft YaHei"/>
+                <a:ea typeface="Microsoft YaHei"/>
+                <a:cs typeface="Microsoft YaHei"/>
+              </a:rPr>
+              <a:t>2</a:t>
+            </a:r>
+          </a:p>
+        </p:txBody>
+      </p:sp>
+      <p:sp>
+        <p:nvSpPr>
+          <p:cNvPr id="12" name="TextBox 11"/>
           <p:cNvSpPr txBox="1"/>
           <p:nvPr/>
         </p:nvSpPr>
         <p:spPr>
           <a:xfrm>
-            <a:off x="6473952" y="1600200"/>
-            <a:ext cx="1097280" cy="914400"/>
+            <a:off x="7086600" y="1207008"/>
+            <a:ext cx="4389120" cy="1746504"/>
           </a:xfrm>
           <a:prstGeom prst="rect">
             <a:avLst/>
@@ -12624,54 +12807,13 @@
           </a:bodyPr>
           <a:lstStyle/>
           <a:p>
-            <a:pPr algn="ctr">
+            <a:pPr algn="l">
               <a:lnSpc>
                 <a:spcPct val="115000"/>
               </a:lnSpc>
             </a:pPr>
             <a:r>
-              <a:rPr sz="3400" b="0" i="0">
-                <a:solidFill>
-                  <a:srgbClr val="222833"/>
-                </a:solidFill>
-                <a:latin typeface="Microsoft YaHei"/>
-                <a:ea typeface="Microsoft YaHei"/>
-                <a:cs typeface="Microsoft YaHei"/>
-              </a:rPr>
-              <a:t>🔍</a:t>
-            </a:r>
-          </a:p>
-        </p:txBody>
-      </p:sp>
-      <p:sp>
-        <p:nvSpPr>
-          <p:cNvPr id="12" name="TextBox 11"/>
-          <p:cNvSpPr txBox="1"/>
-          <p:nvPr/>
-        </p:nvSpPr>
-        <p:spPr>
-          <a:xfrm>
-            <a:off x="7616952" y="1645920"/>
-            <a:ext cx="3931920" cy="1737360"/>
-          </a:xfrm>
-          <a:prstGeom prst="rect">
-            <a:avLst/>
-          </a:prstGeom>
-          <a:noFill/>
-        </p:spPr>
-        <p:txBody>
-          <a:bodyPr wrap="square" anchor="ctr" lIns="36576" rIns="36576" tIns="18288" bIns="18288">
-            <a:spAutoFit/>
-          </a:bodyPr>
-          <a:lstStyle/>
-          <a:p>
-            <a:pPr algn="l">
-              <a:lnSpc>
-                <a:spcPct val="115000"/>
-              </a:lnSpc>
-            </a:pPr>
-            <a:r>
-              <a:rPr sz="1800" b="1" i="0">
+              <a:rPr sz="1700" b="1" i="0">
                 <a:solidFill>
                   <a:srgbClr val="D4A037"/>
                 </a:solidFill>
@@ -12692,7 +12834,7 @@
               </a:spcBef>
             </a:pPr>
             <a:r>
-              <a:rPr sz="1300" b="0" i="0">
+              <a:rPr sz="1200" b="0" i="0">
                 <a:solidFill>
                   <a:srgbClr val="F4F6FA"/>
                 </a:solidFill>
@@ -12700,7 +12842,8 @@
                 <a:ea typeface="Microsoft YaHei"/>
                 <a:cs typeface="Microsoft YaHei"/>
               </a:rPr>
-              <a:t>宣传 × 正式文件对比，揪出弱化与遗漏的风险</a:t>
+              <a:t>宣传 × 正式文件对比
+揪出弱化与遗漏的风险</a:t>
             </a:r>
           </a:p>
         </p:txBody>
@@ -12713,8 +12856,8 @@
         </p:nvSpPr>
         <p:spPr>
           <a:xfrm>
-            <a:off x="457200" y="3931920"/>
-            <a:ext cx="5486400" cy="2194560"/>
+            <a:off x="457200" y="3447288"/>
+            <a:ext cx="5440680" cy="2148840"/>
           </a:xfrm>
           <a:prstGeom prst="roundRect">
             <a:avLst/>
@@ -12722,7 +12865,7 @@
           <a:solidFill>
             <a:srgbClr val="24304E"/>
           </a:solidFill>
-          <a:ln w="15240">
+          <a:ln w="16510">
             <a:solidFill>
               <a:srgbClr val="D4A037"/>
             </a:solidFill>
@@ -12749,7 +12892,7 @@
           <a:p>
             <a:pPr algn="ctr">
               <a:lnSpc>
-                <a:spcPct val="100000"/>
+                <a:spcPct val="105000"/>
               </a:lnSpc>
             </a:pPr>
             <a:r>
@@ -12768,14 +12911,73 @@
       </p:sp>
       <p:sp>
         <p:nvSpPr>
-          <p:cNvPr id="14" name="TextBox 13"/>
+          <p:cNvPr id="14" name="Oval 13"/>
+          <p:cNvSpPr/>
+          <p:nvPr/>
+        </p:nvSpPr>
+        <p:spPr>
+          <a:xfrm>
+            <a:off x="621792" y="3648456"/>
+            <a:ext cx="566928" cy="566928"/>
+          </a:xfrm>
+          <a:prstGeom prst="ellipse">
+            <a:avLst/>
+          </a:prstGeom>
+          <a:solidFill>
+            <a:srgbClr val="D4A037"/>
+          </a:solidFill>
+          <a:ln>
+            <a:noFill/>
+          </a:ln>
+          <a:effectLst/>
+        </p:spPr>
+        <p:style>
+          <a:lnRef idx="1">
+            <a:schemeClr val="accent1"/>
+          </a:lnRef>
+          <a:fillRef idx="3">
+            <a:schemeClr val="accent1"/>
+          </a:fillRef>
+          <a:effectRef idx="2">
+            <a:schemeClr val="accent1"/>
+          </a:effectRef>
+          <a:fontRef idx="minor">
+            <a:schemeClr val="lt1"/>
+          </a:fontRef>
+        </p:style>
+        <p:txBody>
+          <a:bodyPr rtlCol="0" anchor="ctr" wrap="square" lIns="54864" rIns="54864" tIns="27432" bIns="27432"/>
+          <a:lstStyle/>
+          <a:p>
+            <a:pPr algn="ctr">
+              <a:lnSpc>
+                <a:spcPct val="105000"/>
+              </a:lnSpc>
+            </a:pPr>
+            <a:r>
+              <a:rPr sz="2000" b="1" i="0">
+                <a:solidFill>
+                  <a:srgbClr val="16213A"/>
+                </a:solidFill>
+                <a:latin typeface="Microsoft YaHei"/>
+                <a:ea typeface="Microsoft YaHei"/>
+                <a:cs typeface="Microsoft YaHei"/>
+              </a:rPr>
+              <a:t>3</a:t>
+            </a:r>
+          </a:p>
+        </p:txBody>
+      </p:sp>
+      <p:sp>
+        <p:nvSpPr>
+          <p:cNvPr id="15" name="TextBox 14"/>
           <p:cNvSpPr txBox="1"/>
           <p:nvPr/>
         </p:nvSpPr>
         <p:spPr>
           <a:xfrm>
-            <a:off x="685800" y="4114800"/>
-            <a:ext cx="1097280" cy="914400"/>
+            <a:off x="1325880" y="3648456"/>
+            <a:ext cx="4389120" cy="1746504"/>
           </a:xfrm>
           <a:prstGeom prst="rect">
             <a:avLst/>
@@ -12788,54 +12990,13 @@
           </a:bodyPr>
           <a:lstStyle/>
           <a:p>
-            <a:pPr algn="ctr">
+            <a:pPr algn="l">
               <a:lnSpc>
                 <a:spcPct val="115000"/>
               </a:lnSpc>
             </a:pPr>
             <a:r>
-              <a:rPr sz="3400" b="0" i="0">
-                <a:solidFill>
-                  <a:srgbClr val="222833"/>
-                </a:solidFill>
-                <a:latin typeface="Microsoft YaHei"/>
-                <a:ea typeface="Microsoft YaHei"/>
-                <a:cs typeface="Microsoft YaHei"/>
-              </a:rPr>
-              <a:t>📑</a:t>
-            </a:r>
-          </a:p>
-        </p:txBody>
-      </p:sp>
-      <p:sp>
-        <p:nvSpPr>
-          <p:cNvPr id="15" name="TextBox 14"/>
-          <p:cNvSpPr txBox="1"/>
-          <p:nvPr/>
-        </p:nvSpPr>
-        <p:spPr>
-          <a:xfrm>
-            <a:off x="1828800" y="4160520"/>
-            <a:ext cx="3931920" cy="1737360"/>
-          </a:xfrm>
-          <a:prstGeom prst="rect">
-            <a:avLst/>
-          </a:prstGeom>
-          <a:noFill/>
-        </p:spPr>
-        <p:txBody>
-          <a:bodyPr wrap="square" anchor="ctr" lIns="36576" rIns="36576" tIns="18288" bIns="18288">
-            <a:spAutoFit/>
-          </a:bodyPr>
-          <a:lstStyle/>
-          <a:p>
-            <a:pPr algn="l">
-              <a:lnSpc>
-                <a:spcPct val="115000"/>
-              </a:lnSpc>
-            </a:pPr>
-            <a:r>
-              <a:rPr sz="1800" b="1" i="0">
+              <a:rPr sz="1700" b="1" i="0">
                 <a:solidFill>
                   <a:srgbClr val="D4A037"/>
                 </a:solidFill>
@@ -12856,7 +13017,7 @@
               </a:spcBef>
             </a:pPr>
             <a:r>
-              <a:rPr sz="1300" b="0" i="0">
+              <a:rPr sz="1200" b="0" i="0">
                 <a:solidFill>
                   <a:srgbClr val="F4F6FA"/>
                 </a:solidFill>
@@ -12864,7 +13025,8 @@
                 <a:ea typeface="Microsoft YaHei"/>
                 <a:cs typeface="Microsoft YaHei"/>
               </a:rPr>
-              <a:t>每条结论可追溯到原文页码，可审计</a:t>
+              <a:t>每条结论可追溯到原文页码
+第三方可审计验证</a:t>
             </a:r>
           </a:p>
         </p:txBody>
@@ -12877,8 +13039,8 @@
         </p:nvSpPr>
         <p:spPr>
           <a:xfrm>
-            <a:off x="6245352" y="3931920"/>
-            <a:ext cx="5486400" cy="2194560"/>
+            <a:off x="6217920" y="3447288"/>
+            <a:ext cx="5440680" cy="2148840"/>
           </a:xfrm>
           <a:prstGeom prst="roundRect">
             <a:avLst/>
@@ -12886,7 +13048,7 @@
           <a:solidFill>
             <a:srgbClr val="24304E"/>
           </a:solidFill>
-          <a:ln w="15240">
+          <a:ln w="16510">
             <a:solidFill>
               <a:srgbClr val="D4A037"/>
             </a:solidFill>
@@ -12913,7 +13075,7 @@
           <a:p>
             <a:pPr algn="ctr">
               <a:lnSpc>
-                <a:spcPct val="100000"/>
+                <a:spcPct val="105000"/>
               </a:lnSpc>
             </a:pPr>
             <a:r>
@@ -12932,14 +13094,73 @@
       </p:sp>
       <p:sp>
         <p:nvSpPr>
-          <p:cNvPr id="17" name="TextBox 16"/>
+          <p:cNvPr id="17" name="Oval 16"/>
+          <p:cNvSpPr/>
+          <p:nvPr/>
+        </p:nvSpPr>
+        <p:spPr>
+          <a:xfrm>
+            <a:off x="6382512" y="3648456"/>
+            <a:ext cx="566928" cy="566928"/>
+          </a:xfrm>
+          <a:prstGeom prst="ellipse">
+            <a:avLst/>
+          </a:prstGeom>
+          <a:solidFill>
+            <a:srgbClr val="D4A037"/>
+          </a:solidFill>
+          <a:ln>
+            <a:noFill/>
+          </a:ln>
+          <a:effectLst/>
+        </p:spPr>
+        <p:style>
+          <a:lnRef idx="1">
+            <a:schemeClr val="accent1"/>
+          </a:lnRef>
+          <a:fillRef idx="3">
+            <a:schemeClr val="accent1"/>
+          </a:fillRef>
+          <a:effectRef idx="2">
+            <a:schemeClr val="accent1"/>
+          </a:effectRef>
+          <a:fontRef idx="minor">
+            <a:schemeClr val="lt1"/>
+          </a:fontRef>
+        </p:style>
+        <p:txBody>
+          <a:bodyPr rtlCol="0" anchor="ctr" wrap="square" lIns="54864" rIns="54864" tIns="27432" bIns="27432"/>
+          <a:lstStyle/>
+          <a:p>
+            <a:pPr algn="ctr">
+              <a:lnSpc>
+                <a:spcPct val="105000"/>
+              </a:lnSpc>
+            </a:pPr>
+            <a:r>
+              <a:rPr sz="2000" b="1" i="0">
+                <a:solidFill>
+                  <a:srgbClr val="16213A"/>
+                </a:solidFill>
+                <a:latin typeface="Microsoft YaHei"/>
+                <a:ea typeface="Microsoft YaHei"/>
+                <a:cs typeface="Microsoft YaHei"/>
+              </a:rPr>
+              <a:t>4</a:t>
+            </a:r>
+          </a:p>
+        </p:txBody>
+      </p:sp>
+      <p:sp>
+        <p:nvSpPr>
+          <p:cNvPr id="18" name="TextBox 17"/>
           <p:cNvSpPr txBox="1"/>
           <p:nvPr/>
         </p:nvSpPr>
         <p:spPr>
           <a:xfrm>
-            <a:off x="6473952" y="4114800"/>
-            <a:ext cx="1097280" cy="914400"/>
+            <a:off x="7086600" y="3648456"/>
+            <a:ext cx="4389120" cy="1746504"/>
           </a:xfrm>
           <a:prstGeom prst="rect">
             <a:avLst/>
@@ -12952,54 +13173,13 @@
           </a:bodyPr>
           <a:lstStyle/>
           <a:p>
-            <a:pPr algn="ctr">
+            <a:pPr algn="l">
               <a:lnSpc>
                 <a:spcPct val="115000"/>
               </a:lnSpc>
             </a:pPr>
             <a:r>
-              <a:rPr sz="3400" b="0" i="0">
-                <a:solidFill>
-                  <a:srgbClr val="222833"/>
-                </a:solidFill>
-                <a:latin typeface="Microsoft YaHei"/>
-                <a:ea typeface="Microsoft YaHei"/>
-                <a:cs typeface="Microsoft YaHei"/>
-              </a:rPr>
-              <a:t>🛡️</a:t>
-            </a:r>
-          </a:p>
-        </p:txBody>
-      </p:sp>
-      <p:sp>
-        <p:nvSpPr>
-          <p:cNvPr id="18" name="TextBox 17"/>
-          <p:cNvSpPr txBox="1"/>
-          <p:nvPr/>
-        </p:nvSpPr>
-        <p:spPr>
-          <a:xfrm>
-            <a:off x="7616952" y="4160520"/>
-            <a:ext cx="3931920" cy="1737360"/>
-          </a:xfrm>
-          <a:prstGeom prst="rect">
-            <a:avLst/>
-          </a:prstGeom>
-          <a:noFill/>
-        </p:spPr>
-        <p:txBody>
-          <a:bodyPr wrap="square" anchor="ctr" lIns="36576" rIns="36576" tIns="18288" bIns="18288">
-            <a:spAutoFit/>
-          </a:bodyPr>
-          <a:lstStyle/>
-          <a:p>
-            <a:pPr algn="l">
-              <a:lnSpc>
-                <a:spcPct val="115000"/>
-              </a:lnSpc>
-            </a:pPr>
-            <a:r>
-              <a:rPr sz="1800" b="1" i="0">
+              <a:rPr sz="1700" b="1" i="0">
                 <a:solidFill>
                   <a:srgbClr val="D4A037"/>
                 </a:solidFill>
@@ -13020,7 +13200,7 @@
               </a:spcBef>
             </a:pPr>
             <a:r>
-              <a:rPr sz="1300" b="0" i="0">
+              <a:rPr sz="1200" b="0" i="0">
                 <a:solidFill>
                   <a:srgbClr val="F4F6FA"/>
                 </a:solidFill>
@@ -13028,7 +13208,8 @@
                 <a:ea typeface="Microsoft YaHei"/>
                 <a:cs typeface="Microsoft YaHei"/>
               </a:rPr>
-              <a:t>模型 + 规则协同，不依赖 AI 也能跑</a:t>
+              <a:t>模型 + 规则协同运行
+不依赖 AI 也能稳定出结果</a:t>
             </a:r>
           </a:p>
         </p:txBody>
@@ -13047,7 +13228,7 @@
     <p:bg>
       <p:bgPr>
         <a:solidFill>
-          <a:srgbClr val="FFFFFF"/>
+          <a:srgbClr val="FAFBFC"/>
         </a:solidFill>
         <a:effectLst/>
       </p:bgPr>
@@ -13068,7 +13249,7 @@
         <p:spPr>
           <a:xfrm>
             <a:off x="0" y="0"/>
-            <a:ext cx="12191695" cy="960120"/>
+            <a:ext cx="12191695" cy="914400"/>
           </a:xfrm>
           <a:prstGeom prst="rect">
             <a:avLst/>
@@ -13101,7 +13282,7 @@
           <a:p>
             <a:pPr algn="ctr">
               <a:lnSpc>
-                <a:spcPct val="100000"/>
+                <a:spcPct val="105000"/>
               </a:lnSpc>
             </a:pPr>
             <a:r>
@@ -13127,7 +13308,7 @@
         <p:spPr>
           <a:xfrm>
             <a:off x="0" y="0"/>
-            <a:ext cx="128016" cy="960120"/>
+            <a:ext cx="109728" cy="914400"/>
           </a:xfrm>
           <a:prstGeom prst="rect">
             <a:avLst/>
@@ -13160,7 +13341,7 @@
           <a:p>
             <a:pPr algn="ctr">
               <a:lnSpc>
-                <a:spcPct val="100000"/>
+                <a:spcPct val="105000"/>
               </a:lnSpc>
             </a:pPr>
             <a:r>
@@ -13185,8 +13366,8 @@
         </p:nvSpPr>
         <p:spPr>
           <a:xfrm>
-            <a:off x="411480" y="109728"/>
-            <a:ext cx="10515600" cy="777240"/>
+            <a:off x="384048" y="73152"/>
+            <a:ext cx="10515600" cy="768096"/>
           </a:xfrm>
           <a:prstGeom prst="rect">
             <a:avLst/>
@@ -13226,8 +13407,8 @@
         </p:nvSpPr>
         <p:spPr>
           <a:xfrm>
-            <a:off x="411480" y="6419088"/>
-            <a:ext cx="8229600" cy="365760"/>
+            <a:off x="384048" y="6400800"/>
+            <a:ext cx="8229600" cy="347472"/>
           </a:xfrm>
           <a:prstGeom prst="rect">
             <a:avLst/>
@@ -13267,8 +13448,8 @@
         </p:nvSpPr>
         <p:spPr>
           <a:xfrm>
-            <a:off x="10332720" y="6419088"/>
-            <a:ext cx="1371600" cy="365760"/>
+            <a:off x="10241280" y="6400800"/>
+            <a:ext cx="1508760" cy="347472"/>
           </a:xfrm>
           <a:prstGeom prst="rect">
             <a:avLst/>
@@ -13308,8 +13489,8 @@
         </p:nvSpPr>
         <p:spPr>
           <a:xfrm>
-            <a:off x="457200" y="1325880"/>
-            <a:ext cx="5486400" cy="3657600"/>
+            <a:off x="457200" y="1005840"/>
+            <a:ext cx="5577840" cy="3474720"/>
           </a:xfrm>
           <a:prstGeom prst="rect">
             <a:avLst/>
@@ -13327,10 +13508,10 @@
                 <a:spcPct val="115000"/>
               </a:lnSpc>
               <a:spcBef>
-                <a:spcPts val="400"/>
+                <a:spcPts val="300"/>
               </a:spcBef>
               <a:spcAft>
-                <a:spcPts val="400"/>
+                <a:spcPts val="300"/>
               </a:spcAft>
             </a:pPr>
             <a:r>
@@ -13342,7 +13523,7 @@
                 <a:ea typeface="Microsoft YaHei"/>
                 <a:cs typeface="Microsoft YaHei"/>
               </a:rPr>
-              <a:t>• ✅ 自动化测试：6 个 pytest 用例通过</a:t>
+              <a:t>• ✅ 自动化测试：7 个 pytest 用例全部通过</a:t>
             </a:r>
           </a:p>
           <a:p>
@@ -13351,10 +13532,10 @@
                 <a:spcPct val="115000"/>
               </a:lnSpc>
               <a:spcBef>
-                <a:spcPts val="400"/>
+                <a:spcPts val="300"/>
               </a:spcBef>
               <a:spcAft>
-                <a:spcPts val="400"/>
+                <a:spcPts val="300"/>
               </a:spcAft>
             </a:pPr>
             <a:r>
@@ -13366,7 +13547,7 @@
                 <a:ea typeface="Microsoft YaHei"/>
                 <a:cs typeface="Microsoft YaHei"/>
               </a:rPr>
-              <a:t>• 抽取准确率 / 引用准确率 对比 人工标准答案.json</a:t>
+              <a:t>• 三类核心场景测试：标准案例 / 信息遗漏 / 宣传冲突 全部通过</a:t>
             </a:r>
           </a:p>
           <a:p>
@@ -13378,7 +13559,7 @@
                 <a:spcPts val="800"/>
               </a:spcBef>
               <a:spcAft>
-                <a:spcPts val="400"/>
+                <a:spcPts val="300"/>
               </a:spcAft>
             </a:pPr>
             <a:r>
@@ -13390,7 +13571,7 @@
                 <a:ea typeface="Microsoft YaHei"/>
                 <a:cs typeface="Microsoft YaHei"/>
               </a:rPr>
-              <a:t>• 未做外部用户测试 → 如实写「尚未完成外部用户验证」</a:t>
+              <a:t>• 混合 Agent 测试：双Agent / 逐字引用校验 / 幻觉拦截 / 接口安全等 8 项全通过</a:t>
             </a:r>
           </a:p>
           <a:p>
@@ -13402,10 +13583,34 @@
                 <a:spcPts val="800"/>
               </a:spcBef>
               <a:spcAft>
-                <a:spcPts val="400"/>
+                <a:spcPts val="300"/>
               </a:spcAft>
             </a:pPr>
             <a:r>
+              <a:rPr sz="1500" b="1" i="0">
+                <a:solidFill>
+                  <a:srgbClr val="16213A"/>
+                </a:solidFill>
+                <a:latin typeface="Microsoft YaHei"/>
+                <a:ea typeface="Microsoft YaHei"/>
+                <a:cs typeface="Microsoft YaHei"/>
+              </a:rPr>
+              <a:t>• 标准案例实测：字段提取 8/8 ✓  |  宣传问题发现 6/6 ✓  |  页码证据完整 ✓</a:t>
+            </a:r>
+          </a:p>
+          <a:p>
+            <a:pPr algn="l">
+              <a:lnSpc>
+                <a:spcPct val="115000"/>
+              </a:lnSpc>
+              <a:spcBef>
+                <a:spcPts val="800"/>
+              </a:spcBef>
+              <a:spcAft>
+                <a:spcPts val="300"/>
+              </a:spcAft>
+            </a:pPr>
+            <a:r>
               <a:rPr sz="1200" b="0" i="1">
                 <a:solidFill>
                   <a:srgbClr val="C62828"/>
@@ -13414,7 +13619,7 @@
                 <a:ea typeface="Microsoft YaHei"/>
                 <a:cs typeface="Microsoft YaHei"/>
               </a:rPr>
-              <a:t>• ⚠️ 不用团队反馈冒充用户研究</a:t>
+              <a:t>• ⚠️ 尚未完成外部用户验证（如实标注，不用团队反馈冒充）</a:t>
             </a:r>
           </a:p>
         </p:txBody>
@@ -13427,8 +13632,8 @@
         </p:nvSpPr>
         <p:spPr>
           <a:xfrm>
-            <a:off x="6400800" y="1371600"/>
-            <a:ext cx="5303520" cy="365760"/>
+            <a:off x="6400800" y="1005840"/>
+            <a:ext cx="5333695" cy="347472"/>
           </a:xfrm>
           <a:prstGeom prst="rect">
             <a:avLst/>
@@ -13461,11 +13666,11 @@
           <a:p>
             <a:pPr algn="ctr">
               <a:lnSpc>
-                <a:spcPct val="100000"/>
-              </a:lnSpc>
-            </a:pPr>
-            <a:r>
-              <a:rPr sz="1100" b="1" i="0">
+                <a:spcPct val="105000"/>
+              </a:lnSpc>
+            </a:pPr>
+            <a:r>
+              <a:rPr sz="1200" b="1" i="0">
                 <a:solidFill>
                   <a:srgbClr val="16213A"/>
                 </a:solidFill>
@@ -13473,7 +13678,7 @@
                 <a:ea typeface="Microsoft YaHei"/>
                 <a:cs typeface="Microsoft YaHei"/>
               </a:rPr>
-              <a:t>tests/test_core.py · test_demo_case</a:t>
+              <a:t>tests/test_core.py :: test_demo_case（自动化断言）</a:t>
             </a:r>
           </a:p>
         </p:txBody>
@@ -13486,8 +13691,8 @@
         </p:nvSpPr>
         <p:spPr>
           <a:xfrm>
-            <a:off x="6400800" y="1737360"/>
-            <a:ext cx="5303520" cy="3108960"/>
+            <a:off x="6400800" y="1353312"/>
+            <a:ext cx="5333695" cy="2880360"/>
           </a:xfrm>
           <a:prstGeom prst="rect">
             <a:avLst/>
@@ -13520,7 +13725,7 @@
           <a:p>
             <a:pPr algn="ctr">
               <a:lnSpc>
-                <a:spcPct val="100000"/>
+                <a:spcPct val="105000"/>
               </a:lnSpc>
             </a:pPr>
             <a:r>
@@ -13545,8 +13750,8 @@
         </p:nvSpPr>
         <p:spPr>
           <a:xfrm>
-            <a:off x="6537960" y="1828800"/>
-            <a:ext cx="5029200" cy="2926080"/>
+            <a:off x="6510528" y="1444752"/>
+            <a:ext cx="5114239" cy="2697480"/>
           </a:xfrm>
           <a:prstGeom prst="rect">
             <a:avLst/>
@@ -13735,7 +13940,7 @@
                 <a:ea typeface="Consolas"/>
                 <a:cs typeface="Consolas"/>
               </a:rPr>
-              <a:t>    assert fields['固定管理费'].value == '0.30%/年'</a:t>
+              <a:t>    rule_ids = {i.rule_id for i in result.findings}</a:t>
             </a:r>
           </a:p>
           <a:p>
@@ -13753,24 +13958,6 @@
                 <a:ea typeface="Consolas"/>
                 <a:cs typeface="Consolas"/>
               </a:rPr>
-              <a:t>    rule_ids = {i.rule_id for i in result.findings}</a:t>
-            </a:r>
-          </a:p>
-          <a:p>
-            <a:pPr algn="l">
-              <a:lnSpc>
-                <a:spcPct val="105000"/>
-              </a:lnSpc>
-            </a:pPr>
-            <a:r>
-              <a:rPr sz="1000" b="0" i="0">
-                <a:solidFill>
-                  <a:srgbClr val="D4D4D4"/>
-                </a:solidFill>
-                <a:latin typeface="Consolas"/>
-                <a:ea typeface="Consolas"/>
-                <a:cs typeface="Consolas"/>
-              </a:rPr>
               <a:t>    assert {'R01','R02','R04','R06','R08','R10'} &lt;= rule_ids</a:t>
             </a:r>
           </a:p>
@@ -13784,8 +13971,8 @@
         </p:nvSpPr>
         <p:spPr>
           <a:xfrm>
-            <a:off x="6400800" y="4663440"/>
-            <a:ext cx="5303520" cy="914400"/>
+            <a:off x="6400800" y="4343400"/>
+            <a:ext cx="5333695" cy="804672"/>
           </a:xfrm>
           <a:prstGeom prst="roundRect">
             <a:avLst/>
@@ -13820,7 +14007,7 @@
           <a:p>
             <a:pPr algn="ctr">
               <a:lnSpc>
-                <a:spcPct val="100000"/>
+                <a:spcPct val="105000"/>
               </a:lnSpc>
             </a:pPr>
             <a:r>
@@ -13832,7 +14019,7 @@
                 <a:ea typeface="Microsoft YaHei"/>
                 <a:cs typeface="Microsoft YaHei"/>
               </a:rPr>
-              <a:t>结论可验证：每条断言都能回链到 sample_data 人工标准答案</a:t>
+              <a:t>每条断言均可回链到 sample_data/人工标准答案.json 进行独立验证</a:t>
             </a:r>
           </a:p>
         </p:txBody>

--- a/docs/商业计划书.pptx
+++ b/docs/商业计划书.pptx
@@ -7677,7 +7677,7 @@
         <p:spPr>
           <a:xfrm>
             <a:off x="6537960" y="1005840"/>
-            <a:ext cx="3487549036934" cy="4933151423999"/>
+            <a:ext cx="3814030" cy="5394960"/>
           </a:xfrm>
           <a:prstGeom prst="rect">
             <a:avLst/>
@@ -9861,7 +9861,7 @@
         <p:spPr>
           <a:xfrm>
             <a:off x="6492240" y="1051560"/>
-            <a:ext cx="4709905236000" cy="3103158647438"/>
+            <a:ext cx="5150815" cy="3393655"/>
           </a:xfrm>
           <a:prstGeom prst="rect">
             <a:avLst/>
